--- a/Y9_Exploring_Science/9C_Threat_from_disease/9C_L04_Treating_diseases.pptx
+++ b/Y9_Exploring_Science/9C_Threat_from_disease/9C_L04_Treating_diseases.pptx
@@ -1740,7 +1740,7 @@
         <p:spPr>
           <a:xfrm>
             <a:off x="548640" y="3657600"/>
-            <a:ext cx="10515600" cy="914400"/>
+            <a:ext cx="10515600" cy="1097280"/>
           </a:xfrm>
           <a:prstGeom prst="rect">
             <a:avLst/>
@@ -1753,7 +1753,7 @@
           <a:lstStyle>
             <a:lvl1pPr indent="0" marL="0">
               <a:buNone/>
-              <a:defRPr lang="en-US" sz="2000" dirty="0">
+              <a:defRPr lang="en-US" sz="2400" dirty="0">
                 <a:solidFill>
                   <a:srgbClr val="FFFFFF"/>
                 </a:solidFill>
@@ -1764,7 +1764,7 @@
             <a:pPr indent="0" marL="0">
               <a:buNone/>
             </a:pPr>
-            <a:endParaRPr lang="en-US" sz="2000" dirty="0"/>
+            <a:endParaRPr lang="en-US" sz="2400" dirty="0"/>
           </a:p>
         </p:txBody>
       </p:sp>
@@ -1864,14 +1864,14 @@
               <a:buNone/>
             </a:pPr>
             <a:r>
-              <a:rPr lang="en-US" sz="900" dirty="0">
+              <a:rPr lang="en-US" sz="1000" dirty="0">
                 <a:solidFill>
                   <a:srgbClr val="5B6574"/>
                 </a:solidFill>
               </a:rPr>
               <a:t>Year 9 Science  |  9C Threat from disease  |  Lesson 4: Treating diseases</a:t>
             </a:r>
-            <a:endParaRPr lang="en-US" sz="900" dirty="0"/>
+            <a:endParaRPr lang="en-US" sz="1000" dirty="0"/>
           </a:p>
         </p:txBody>
       </p:sp>
@@ -2040,14 +2040,14 @@
               <a:buNone/>
             </a:pPr>
             <a:r>
-              <a:rPr lang="en-US" sz="900" dirty="0">
+              <a:rPr lang="en-US" sz="1000" dirty="0">
                 <a:solidFill>
                   <a:srgbClr val="5B6574"/>
                 </a:solidFill>
               </a:rPr>
               <a:t>Year 9 Science  |  9C Threat from disease  |  Lesson 4: Treating diseases</a:t>
             </a:r>
-            <a:endParaRPr lang="en-US" sz="900" dirty="0"/>
+            <a:endParaRPr lang="en-US" sz="1000" dirty="0"/>
           </a:p>
         </p:txBody>
       </p:sp>
@@ -2216,14 +2216,14 @@
               <a:buNone/>
             </a:pPr>
             <a:r>
-              <a:rPr lang="en-US" sz="900" dirty="0">
+              <a:rPr lang="en-US" sz="1000" dirty="0">
                 <a:solidFill>
                   <a:srgbClr val="5B6574"/>
                 </a:solidFill>
               </a:rPr>
               <a:t>Year 9 Science  |  9C Threat from disease  |  Lesson 4: Treating diseases</a:t>
             </a:r>
-            <a:endParaRPr lang="en-US" sz="900" dirty="0"/>
+            <a:endParaRPr lang="en-US" sz="1000" dirty="0"/>
           </a:p>
         </p:txBody>
       </p:sp>
@@ -2352,7 +2352,7 @@
           <a:lstStyle>
             <a:lvl1pPr indent="0" marL="0">
               <a:buNone/>
-              <a:defRPr lang="en-US" sz="3000" b="1" dirty="0">
+              <a:defRPr lang="en-US" sz="3400" b="1" dirty="0">
                 <a:solidFill>
                   <a:srgbClr val="3A2E00"/>
                 </a:solidFill>
@@ -2363,7 +2363,7 @@
             <a:pPr indent="0" marL="0">
               <a:buNone/>
             </a:pPr>
-            <a:endParaRPr lang="en-US" sz="3000" dirty="0"/>
+            <a:endParaRPr lang="en-US" sz="3400" dirty="0"/>
           </a:p>
         </p:txBody>
       </p:sp>
@@ -2780,14 +2780,14 @@
               <a:buNone/>
             </a:pPr>
             <a:r>
-              <a:rPr lang="en-US" sz="1300" b="1" spc="200" kern="0" dirty="0">
+              <a:rPr lang="en-US" sz="1400" b="1" spc="200" kern="0" dirty="0">
                 <a:solidFill>
                   <a:srgbClr val="F2CE3E"/>
                 </a:solidFill>
               </a:rPr>
               <a:t>YEAR 9 SCIENCE  ·  9C THREAT FROM DISEASE  ·  LESSON 4 OF 7</a:t>
             </a:r>
-            <a:endParaRPr lang="en-US" sz="1300" dirty="0"/>
+            <a:endParaRPr lang="en-US" sz="1400" dirty="0"/>
           </a:p>
         </p:txBody>
       </p:sp>
@@ -2840,7 +2840,7 @@
         <p:spPr>
           <a:xfrm>
             <a:off x="548640" y="3657600"/>
-            <a:ext cx="10515600" cy="914400"/>
+            <a:ext cx="10515600" cy="1097280"/>
           </a:xfrm>
           <a:prstGeom prst="rect">
             <a:avLst/>
@@ -2856,14 +2856,14 @@
               <a:buNone/>
             </a:pPr>
             <a:r>
-              <a:rPr lang="en-US" sz="2000" dirty="0">
+              <a:rPr lang="en-US" sz="2400" dirty="0">
                 <a:solidFill>
                   <a:srgbClr val="FFFFFF"/>
                 </a:solidFill>
               </a:rPr>
               <a:t>Which medicine for which disease, and how do bacteria make human insulin?</a:t>
             </a:r>
-            <a:endParaRPr lang="en-US" sz="2000" dirty="0"/>
+            <a:endParaRPr lang="en-US" sz="2400" dirty="0"/>
           </a:p>
         </p:txBody>
       </p:sp>
@@ -2892,14 +2892,14 @@
               <a:buNone/>
             </a:pPr>
             <a:r>
-              <a:rPr lang="en-US" sz="1200" dirty="0">
+              <a:rPr lang="en-US" sz="1400" dirty="0">
                 <a:solidFill>
                   <a:srgbClr val="C9D3E6"/>
                 </a:solidFill>
               </a:rPr>
               <a:t>Exploring Science International 9  ·  Student Book pages 44 to 45  ·  Workbook pages 32</a:t>
             </a:r>
-            <a:endParaRPr lang="en-US" sz="1200" dirty="0"/>
+            <a:endParaRPr lang="en-US" sz="1400" dirty="0"/>
           </a:p>
         </p:txBody>
       </p:sp>
@@ -3207,23 +3207,21 @@
           <a:ln/>
         </p:spPr>
         <p:txBody>
-          <a:bodyPr wrap="square" lIns="0" tIns="0" rIns="0" bIns="0" rtlCol="0" anchor="t">
-            <a:normAutofit/>
-          </a:bodyPr>
+          <a:bodyPr wrap="square" lIns="0" tIns="0" rIns="0" bIns="0" rtlCol="0" anchor="t"/>
           <a:lstStyle/>
           <a:p>
             <a:pPr indent="0" marL="0">
               <a:buNone/>
             </a:pPr>
             <a:r>
-              <a:rPr lang="en-US" sz="1700" dirty="0">
+              <a:rPr lang="en-US" sz="2000" dirty="0">
                 <a:solidFill>
                   <a:srgbClr val="141B26"/>
                 </a:solidFill>
               </a:rPr>
               <a:t>Core: match the medicines to their meanings, then tick the right treatment for each disease.</a:t>
             </a:r>
-            <a:endParaRPr lang="en-US" sz="1700" dirty="0"/>
+            <a:endParaRPr lang="en-US" sz="2000" dirty="0"/>
           </a:p>
         </p:txBody>
       </p:sp>
@@ -3306,23 +3304,21 @@
           <a:ln/>
         </p:spPr>
         <p:txBody>
-          <a:bodyPr wrap="square" lIns="0" tIns="0" rIns="0" bIns="0" rtlCol="0" anchor="t">
-            <a:normAutofit/>
-          </a:bodyPr>
+          <a:bodyPr wrap="square" lIns="0" tIns="0" rIns="0" bIns="0" rtlCol="0" anchor="t"/>
           <a:lstStyle/>
           <a:p>
             <a:pPr indent="0" marL="0">
               <a:buNone/>
             </a:pPr>
             <a:r>
-              <a:rPr lang="en-US" sz="1700" dirty="0">
+              <a:rPr lang="en-US" sz="2000" dirty="0">
                 <a:solidFill>
                   <a:srgbClr val="141B26"/>
                 </a:solidFill>
               </a:rPr>
               <a:t>Core: complete the fermenter gap fill with the word bank.</a:t>
             </a:r>
-            <a:endParaRPr lang="en-US" sz="1700" dirty="0"/>
+            <a:endParaRPr lang="en-US" sz="2000" dirty="0"/>
           </a:p>
         </p:txBody>
       </p:sp>
@@ -3405,23 +3401,21 @@
           <a:ln/>
         </p:spPr>
         <p:txBody>
-          <a:bodyPr wrap="square" lIns="0" tIns="0" rIns="0" bIns="0" rtlCol="0" anchor="t">
-            <a:normAutofit/>
-          </a:bodyPr>
+          <a:bodyPr wrap="square" lIns="0" tIns="0" rIns="0" bIns="0" rtlCol="0" anchor="t"/>
           <a:lstStyle/>
           <a:p>
             <a:pPr indent="0" marL="0">
               <a:buNone/>
             </a:pPr>
             <a:r>
-              <a:rPr lang="en-US" sz="1700" dirty="0">
+              <a:rPr lang="en-US" sz="2000" dirty="0">
                 <a:solidFill>
                   <a:srgbClr val="141B26"/>
                 </a:solidFill>
               </a:rPr>
               <a:t>Stretch: why medicines are drugs; how transgenic bacteria make growth hormone; type 1 diabetes and organ damage.</a:t>
             </a:r>
-            <a:endParaRPr lang="en-US" sz="1700" dirty="0"/>
+            <a:endParaRPr lang="en-US" sz="2000" dirty="0"/>
           </a:p>
         </p:txBody>
       </p:sp>
@@ -3504,23 +3498,21 @@
           <a:ln/>
         </p:spPr>
         <p:txBody>
-          <a:bodyPr wrap="square" lIns="0" tIns="0" rIns="0" bIns="0" rtlCol="0" anchor="t">
-            <a:normAutofit/>
-          </a:bodyPr>
+          <a:bodyPr wrap="square" lIns="0" tIns="0" rIns="0" bIns="0" rtlCol="0" anchor="t"/>
           <a:lstStyle/>
           <a:p>
             <a:pPr indent="0" marL="0">
               <a:buNone/>
             </a:pPr>
             <a:r>
-              <a:rPr lang="en-US" sz="1700" dirty="0">
+              <a:rPr lang="en-US" sz="2000" dirty="0">
                 <a:solidFill>
                   <a:srgbClr val="141B26"/>
                 </a:solidFill>
               </a:rPr>
               <a:t>Challenge: the conditions inside a fermenter and the aseptic precautions; a GM organism that is not transgenic.</a:t>
             </a:r>
-            <a:endParaRPr lang="en-US" sz="1700" dirty="0"/>
+            <a:endParaRPr lang="en-US" sz="2000" dirty="0"/>
           </a:p>
         </p:txBody>
       </p:sp>
@@ -3603,23 +3595,21 @@
           <a:ln/>
         </p:spPr>
         <p:txBody>
-          <a:bodyPr wrap="square" lIns="0" tIns="0" rIns="0" bIns="0" rtlCol="0" anchor="t">
-            <a:normAutofit/>
-          </a:bodyPr>
+          <a:bodyPr wrap="square" lIns="0" tIns="0" rIns="0" bIns="0" rtlCol="0" anchor="t"/>
           <a:lstStyle/>
           <a:p>
             <a:pPr indent="0" marL="0">
               <a:buNone/>
             </a:pPr>
             <a:r>
-              <a:rPr lang="en-US" sz="1700" dirty="0">
+              <a:rPr lang="en-US" sz="2000" dirty="0">
                 <a:solidFill>
                   <a:srgbClr val="141B26"/>
                 </a:solidFill>
               </a:rPr>
               <a:t>Finished? Answer the My thinking question about antibiotic resistance.</a:t>
             </a:r>
-            <a:endParaRPr lang="en-US" sz="1700" dirty="0"/>
+            <a:endParaRPr lang="en-US" sz="2000" dirty="0"/>
           </a:p>
         </p:txBody>
       </p:sp>
@@ -3648,14 +3638,14 @@
               <a:buNone/>
             </a:pPr>
             <a:r>
-              <a:rPr lang="en-US" sz="1300" i="1" dirty="0">
+              <a:rPr lang="en-US" sz="1500" i="1" dirty="0">
                 <a:solidFill>
                   <a:srgbClr val="5B6574"/>
                 </a:solidFill>
               </a:rPr>
               <a:t>Say the type of disease first, then the treatment: that is the logic the examiner wants.</a:t>
             </a:r>
-            <a:endParaRPr lang="en-US" sz="1300" dirty="0"/>
+            <a:endParaRPr lang="en-US" sz="1500" dirty="0"/>
           </a:p>
         </p:txBody>
       </p:sp>
@@ -3848,23 +3838,21 @@
           <a:ln/>
         </p:spPr>
         <p:txBody>
-          <a:bodyPr wrap="square" lIns="0" tIns="0" rIns="0" bIns="0" rtlCol="0" anchor="t">
-            <a:normAutofit/>
-          </a:bodyPr>
+          <a:bodyPr wrap="square" lIns="0" tIns="0" rIns="0" bIns="0" rtlCol="0" anchor="t"/>
           <a:lstStyle/>
           <a:p>
             <a:pPr indent="0" marL="0">
               <a:buNone/>
             </a:pPr>
             <a:r>
-              <a:rPr lang="en-US" sz="2200" b="1" dirty="0">
+              <a:rPr lang="en-US" sz="2600" b="1" dirty="0">
                 <a:solidFill>
                   <a:srgbClr val="0F2A5F"/>
                 </a:solidFill>
               </a:rPr>
               <a:t>A patient with a bad cold asks the doctor for antibiotics. The doctor says no. The patient is annoyed. What should the doctor say to explain?</a:t>
             </a:r>
-            <a:endParaRPr lang="en-US" sz="2200" dirty="0"/>
+            <a:endParaRPr lang="en-US" sz="2600" dirty="0"/>
           </a:p>
         </p:txBody>
       </p:sp>
@@ -3913,9 +3901,7 @@
           <a:ln/>
         </p:spPr>
         <p:txBody>
-          <a:bodyPr wrap="square" lIns="0" tIns="0" rIns="0" bIns="0" rtlCol="0" anchor="t">
-            <a:normAutofit/>
-          </a:bodyPr>
+          <a:bodyPr wrap="square" lIns="0" tIns="0" rIns="0" bIns="0" rtlCol="0" anchor="t"/>
           <a:lstStyle/>
           <a:p>
             <a:pPr indent="0" marL="0">
@@ -3925,14 +3911,14 @@
               <a:buNone/>
             </a:pPr>
             <a:r>
-              <a:rPr lang="en-US" sz="1500" b="1" dirty="0">
+              <a:rPr lang="en-US" sz="1800" b="1" dirty="0">
                 <a:solidFill>
                   <a:srgbClr val="7B3A8E"/>
                 </a:solidFill>
               </a:rPr>
               <a:t>Sentence frames</a:t>
             </a:r>
-            <a:endParaRPr lang="en-US" sz="1500" dirty="0"/>
+            <a:endParaRPr lang="en-US" sz="1800" dirty="0"/>
           </a:p>
           <a:p>
             <a:pPr indent="0" marL="0">
@@ -3942,14 +3928,14 @@
               <a:buNone/>
             </a:pPr>
             <a:r>
-              <a:rPr lang="en-US" sz="1500" dirty="0">
+              <a:rPr lang="en-US" sz="1800" dirty="0">
                 <a:solidFill>
                   <a:srgbClr val="141B26"/>
                 </a:solidFill>
               </a:rPr>
               <a:t>A cold is caused by a ___, and antibiotics only kill ___.</a:t>
             </a:r>
-            <a:endParaRPr lang="en-US" sz="1500" dirty="0"/>
+            <a:endParaRPr lang="en-US" sz="1800" dirty="0"/>
           </a:p>
           <a:p>
             <a:pPr indent="0" marL="0">
@@ -3959,14 +3945,14 @@
               <a:buNone/>
             </a:pPr>
             <a:r>
-              <a:rPr lang="en-US" sz="1500" dirty="0">
+              <a:rPr lang="en-US" sz="1800" dirty="0">
                 <a:solidFill>
                   <a:srgbClr val="141B26"/>
                 </a:solidFill>
               </a:rPr>
               <a:t>Taking antibiotics when they are not needed can ___.</a:t>
             </a:r>
-            <a:endParaRPr lang="en-US" sz="1500" dirty="0"/>
+            <a:endParaRPr lang="en-US" sz="1800" dirty="0"/>
           </a:p>
           <a:p>
             <a:pPr indent="0" marL="0">
@@ -3976,14 +3962,14 @@
               <a:buNone/>
             </a:pPr>
             <a:r>
-              <a:rPr lang="en-US" sz="1500" dirty="0">
+              <a:rPr lang="en-US" sz="1800" dirty="0">
                 <a:solidFill>
                   <a:srgbClr val="141B26"/>
                 </a:solidFill>
               </a:rPr>
               <a:t>Instead, the doctor could suggest ___.</a:t>
             </a:r>
-            <a:endParaRPr lang="en-US" sz="1500" dirty="0"/>
+            <a:endParaRPr lang="en-US" sz="1800" dirty="0"/>
           </a:p>
         </p:txBody>
       </p:sp>
@@ -4183,14 +4169,14 @@
               <a:buNone/>
             </a:pPr>
             <a:r>
-              <a:rPr lang="en-US" sz="1400" i="1" dirty="0">
+              <a:rPr lang="en-US" sz="1600" i="1" dirty="0">
                 <a:solidFill>
                   <a:srgbClr val="5B6574"/>
                 </a:solidFill>
               </a:rPr>
               <a:t>On your worksheet exit ticket. Work alone. Hand it in as you leave.</a:t>
             </a:r>
-            <a:endParaRPr lang="en-US" sz="1400" dirty="0"/>
+            <a:endParaRPr lang="en-US" sz="1600" dirty="0"/>
           </a:p>
         </p:txBody>
       </p:sp>
@@ -4203,25 +4189,23 @@
         <p:spPr>
           <a:xfrm>
             <a:off x="548640" y="1828800"/>
-            <a:ext cx="10881360" cy="1188720"/>
-          </a:xfrm>
-          <a:prstGeom prst="rect">
-            <a:avLst/>
-          </a:prstGeom>
-          <a:noFill/>
-          <a:ln/>
-        </p:spPr>
-        <p:txBody>
-          <a:bodyPr wrap="square" lIns="0" tIns="0" rIns="0" bIns="0" rtlCol="0" anchor="t">
-            <a:normAutofit/>
-          </a:bodyPr>
+            <a:ext cx="9692640" cy="1188720"/>
+          </a:xfrm>
+          <a:prstGeom prst="rect">
+            <a:avLst/>
+          </a:prstGeom>
+          <a:noFill/>
+          <a:ln/>
+        </p:spPr>
+        <p:txBody>
+          <a:bodyPr wrap="square" lIns="0" tIns="0" rIns="0" bIns="0" rtlCol="0" anchor="t"/>
           <a:lstStyle/>
           <a:p>
             <a:pPr indent="0" marL="0">
               <a:buNone/>
             </a:pPr>
             <a:r>
-              <a:rPr lang="en-US" sz="1800" b="1" dirty="0">
+              <a:rPr lang="en-US" sz="2200" b="1" dirty="0">
                 <a:solidFill>
                   <a:srgbClr val="7B3A8E"/>
                 </a:solidFill>
@@ -4232,14 +4216,14 @@
               <a:buNone/>
             </a:pPr>
             <a:r>
-              <a:rPr lang="en-US" sz="1800" dirty="0">
+              <a:rPr lang="en-US" sz="2200" dirty="0">
                 <a:solidFill>
                   <a:srgbClr val="141B26"/>
                 </a:solidFill>
               </a:rPr>
               <a:t>What is the difference between an antibiotic and an antiviral?</a:t>
             </a:r>
-            <a:endParaRPr lang="en-US" sz="1800" dirty="0"/>
+            <a:endParaRPr lang="en-US" sz="2200" dirty="0"/>
           </a:p>
         </p:txBody>
       </p:sp>
@@ -4252,25 +4236,23 @@
         <p:spPr>
           <a:xfrm>
             <a:off x="548640" y="3017520"/>
-            <a:ext cx="10881360" cy="1188720"/>
-          </a:xfrm>
-          <a:prstGeom prst="rect">
-            <a:avLst/>
-          </a:prstGeom>
-          <a:noFill/>
-          <a:ln/>
-        </p:spPr>
-        <p:txBody>
-          <a:bodyPr wrap="square" lIns="0" tIns="0" rIns="0" bIns="0" rtlCol="0" anchor="t">
-            <a:normAutofit/>
-          </a:bodyPr>
+            <a:ext cx="9692640" cy="1188720"/>
+          </a:xfrm>
+          <a:prstGeom prst="rect">
+            <a:avLst/>
+          </a:prstGeom>
+          <a:noFill/>
+          <a:ln/>
+        </p:spPr>
+        <p:txBody>
+          <a:bodyPr wrap="square" lIns="0" tIns="0" rIns="0" bIns="0" rtlCol="0" anchor="t"/>
           <a:lstStyle/>
           <a:p>
             <a:pPr indent="0" marL="0">
               <a:buNone/>
             </a:pPr>
             <a:r>
-              <a:rPr lang="en-US" sz="1800" b="1" dirty="0">
+              <a:rPr lang="en-US" sz="2200" b="1" dirty="0">
                 <a:solidFill>
                   <a:srgbClr val="7B3A8E"/>
                 </a:solidFill>
@@ -4281,14 +4263,14 @@
               <a:buNone/>
             </a:pPr>
             <a:r>
-              <a:rPr lang="en-US" sz="1800" dirty="0">
+              <a:rPr lang="en-US" sz="2200" dirty="0">
                 <a:solidFill>
                   <a:srgbClr val="141B26"/>
                 </a:solidFill>
               </a:rPr>
               <a:t>What does 'transgenic' mean?</a:t>
             </a:r>
-            <a:endParaRPr lang="en-US" sz="1800" dirty="0"/>
+            <a:endParaRPr lang="en-US" sz="2200" dirty="0"/>
           </a:p>
         </p:txBody>
       </p:sp>
@@ -4301,25 +4283,23 @@
         <p:spPr>
           <a:xfrm>
             <a:off x="548640" y="4206240"/>
-            <a:ext cx="10881360" cy="1188720"/>
-          </a:xfrm>
-          <a:prstGeom prst="rect">
-            <a:avLst/>
-          </a:prstGeom>
-          <a:noFill/>
-          <a:ln/>
-        </p:spPr>
-        <p:txBody>
-          <a:bodyPr wrap="square" lIns="0" tIns="0" rIns="0" bIns="0" rtlCol="0" anchor="t">
-            <a:normAutofit/>
-          </a:bodyPr>
+            <a:ext cx="9692640" cy="1188720"/>
+          </a:xfrm>
+          <a:prstGeom prst="rect">
+            <a:avLst/>
+          </a:prstGeom>
+          <a:noFill/>
+          <a:ln/>
+        </p:spPr>
+        <p:txBody>
+          <a:bodyPr wrap="square" lIns="0" tIns="0" rIns="0" bIns="0" rtlCol="0" anchor="t"/>
           <a:lstStyle/>
           <a:p>
             <a:pPr indent="0" marL="0">
               <a:buNone/>
             </a:pPr>
             <a:r>
-              <a:rPr lang="en-US" sz="1800" b="1" dirty="0">
+              <a:rPr lang="en-US" sz="2200" b="1" dirty="0">
                 <a:solidFill>
                   <a:srgbClr val="7B3A8E"/>
                 </a:solidFill>
@@ -4330,14 +4310,14 @@
               <a:buNone/>
             </a:pPr>
             <a:r>
-              <a:rPr lang="en-US" sz="1800" dirty="0">
+              <a:rPr lang="en-US" sz="2200" dirty="0">
                 <a:solidFill>
                   <a:srgbClr val="141B26"/>
                 </a:solidFill>
               </a:rPr>
               <a:t>Give one reason why a fermenter is sterilised before use.</a:t>
             </a:r>
-            <a:endParaRPr lang="en-US" sz="1800" dirty="0"/>
+            <a:endParaRPr lang="en-US" sz="2200" dirty="0"/>
           </a:p>
         </p:txBody>
       </p:sp>
@@ -4596,90 +4576,88 @@
         <p:spPr>
           <a:xfrm>
             <a:off x="548640" y="1371600"/>
-            <a:ext cx="10881360" cy="4480560"/>
-          </a:xfrm>
-          <a:prstGeom prst="rect">
-            <a:avLst/>
-          </a:prstGeom>
-          <a:noFill/>
-          <a:ln/>
-        </p:spPr>
-        <p:txBody>
-          <a:bodyPr wrap="square" lIns="0" tIns="0" rIns="0" bIns="0" rtlCol="0" anchor="t">
-            <a:normAutofit/>
-          </a:bodyPr>
+            <a:ext cx="10881360" cy="4114800"/>
+          </a:xfrm>
+          <a:prstGeom prst="rect">
+            <a:avLst/>
+          </a:prstGeom>
+          <a:noFill/>
+          <a:ln/>
+        </p:spPr>
+        <p:txBody>
+          <a:bodyPr wrap="square" lIns="0" tIns="0" rIns="0" bIns="0" rtlCol="0" anchor="t"/>
           <a:lstStyle/>
           <a:p>
             <a:pPr marL="342900" indent="-342900">
               <a:spcAft>
-                <a:spcPts val="1000"/>
+                <a:spcPts val="1200"/>
               </a:spcAft>
               <a:buSzPct val="100000"/>
               <a:buChar char="✓"/>
             </a:pPr>
             <a:r>
-              <a:rPr lang="en-US" sz="1700" dirty="0">
+              <a:rPr lang="en-US" sz="2000" dirty="0">
                 <a:solidFill>
                   <a:srgbClr val="141B26"/>
                 </a:solidFill>
               </a:rPr>
               <a:t>Medicines are drugs used to treat or prevent disease: antibiotics kill bacteria, antivirals stop viruses replicating.</a:t>
             </a:r>
-            <a:endParaRPr lang="en-US" sz="1700" dirty="0"/>
+            <a:endParaRPr lang="en-US" sz="2000" dirty="0"/>
           </a:p>
           <a:p>
             <a:pPr marL="342900" indent="-342900">
               <a:spcAft>
-                <a:spcPts val="1000"/>
+                <a:spcPts val="1200"/>
               </a:spcAft>
               <a:buSzPct val="100000"/>
               <a:buChar char="✓"/>
             </a:pPr>
             <a:r>
-              <a:rPr lang="en-US" sz="1700" dirty="0">
+              <a:rPr lang="en-US" sz="2000" dirty="0">
                 <a:solidFill>
                   <a:srgbClr val="141B26"/>
                 </a:solidFill>
               </a:rPr>
               <a:t>Genetic disorders and autoimmune diseases cannot be cured, but missing hormones such as insulin can be replaced.</a:t>
             </a:r>
-            <a:endParaRPr lang="en-US" sz="1700" dirty="0"/>
+            <a:endParaRPr lang="en-US" sz="2000" dirty="0"/>
           </a:p>
           <a:p>
             <a:pPr marL="342900" indent="-342900">
               <a:spcAft>
-                <a:spcPts val="1000"/>
+                <a:spcPts val="1200"/>
               </a:spcAft>
               <a:buSzPct val="100000"/>
               <a:buChar char="✓"/>
             </a:pPr>
             <a:r>
-              <a:rPr lang="en-US" sz="1700" dirty="0">
+              <a:rPr lang="en-US" sz="2000" dirty="0">
                 <a:solidFill>
                   <a:srgbClr val="141B26"/>
                 </a:solidFill>
               </a:rPr>
               <a:t>Transgenic bacteria carry a human gene and make the human hormone.</a:t>
             </a:r>
-            <a:endParaRPr lang="en-US" sz="1700" dirty="0"/>
+            <a:endParaRPr lang="en-US" sz="2000" dirty="0"/>
           </a:p>
           <a:p>
             <a:pPr marL="342900" indent="-342900">
               <a:spcAft>
-                <a:spcPts val="1000"/>
+                <a:spcPts val="1200"/>
               </a:spcAft>
               <a:buSzPct val="100000"/>
               <a:buChar char="✓"/>
             </a:pPr>
             <a:r>
-              <a:rPr lang="en-US" sz="1700" dirty="0">
+              <a:rPr lang="en-US" sz="2000" dirty="0">
                 <a:solidFill>
                   <a:srgbClr val="141B26"/>
                 </a:solidFill>
               </a:rPr>
               <a:t>Fermenters give bacteria the best conditions: sterile, with nutrients, filtered air, stirring and a steady temperature and pH.</a:t>
             </a:r>
-            <a:endParaRPr lang="en-US" sz="1700" dirty="0"/>
+            <a:endParaRPr lang="en-US" sz="2000" dirty="0"/>
           </a:p>
         </p:txBody>
       </p:sp>
@@ -4708,7 +4686,7 @@
               <a:buNone/>
             </a:pPr>
             <a:r>
-              <a:rPr lang="en-US" sz="1300" b="1" dirty="0">
+              <a:rPr lang="en-US" sz="1400" b="1" dirty="0">
                 <a:solidFill>
                   <a:srgbClr val="7B3A8E"/>
                 </a:solidFill>
@@ -4719,14 +4697,14 @@
               <a:buNone/>
             </a:pPr>
             <a:r>
-              <a:rPr lang="en-US" sz="1300" dirty="0">
+              <a:rPr lang="en-US" sz="1400" dirty="0">
                 <a:solidFill>
                   <a:srgbClr val="141B26"/>
                 </a:solidFill>
               </a:rPr>
               <a:t>Medians and quartiles: how scientists use statistics to work out who a medicine helps in a clinical trial.</a:t>
             </a:r>
-            <a:endParaRPr lang="en-US" sz="1300" dirty="0"/>
+            <a:endParaRPr lang="en-US" sz="1400" dirty="0"/>
           </a:p>
         </p:txBody>
       </p:sp>
@@ -4994,60 +4972,58 @@
           <a:ln/>
         </p:spPr>
         <p:txBody>
-          <a:bodyPr wrap="square" lIns="0" tIns="0" rIns="0" bIns="0" rtlCol="0" anchor="t">
-            <a:normAutofit/>
-          </a:bodyPr>
+          <a:bodyPr wrap="square" lIns="0" tIns="0" rIns="0" bIns="0" rtlCol="0" anchor="t"/>
           <a:lstStyle/>
           <a:p>
             <a:pPr indent="0" marL="0">
               <a:spcAft>
-                <a:spcPts val="1000"/>
+                <a:spcPts val="1200"/>
               </a:spcAft>
               <a:buNone/>
             </a:pPr>
             <a:r>
-              <a:rPr lang="en-US" sz="2000" dirty="0">
+              <a:rPr lang="en-US" sz="2400" dirty="0">
                 <a:solidFill>
                   <a:srgbClr val="141B26"/>
                 </a:solidFill>
               </a:rPr>
               <a:t>1. An ear infection is caused by bacteria. Would you give an antibiotic or an antiviral?</a:t>
             </a:r>
-            <a:endParaRPr lang="en-US" sz="2000" dirty="0"/>
+            <a:endParaRPr lang="en-US" sz="2400" dirty="0"/>
           </a:p>
           <a:p>
             <a:pPr indent="0" marL="0">
               <a:spcAft>
-                <a:spcPts val="1000"/>
+                <a:spcPts val="1200"/>
               </a:spcAft>
               <a:buNone/>
             </a:pPr>
             <a:r>
-              <a:rPr lang="en-US" sz="2000" dirty="0">
+              <a:rPr lang="en-US" sz="2400" dirty="0">
                 <a:solidFill>
                   <a:srgbClr val="141B26"/>
                 </a:solidFill>
               </a:rPr>
               <a:t>2. Scurvy is caused by too little vitamin C. How would you treat it?</a:t>
             </a:r>
-            <a:endParaRPr lang="en-US" sz="2000" dirty="0"/>
+            <a:endParaRPr lang="en-US" sz="2400" dirty="0"/>
           </a:p>
           <a:p>
             <a:pPr indent="0" marL="0">
               <a:spcAft>
-                <a:spcPts val="1000"/>
+                <a:spcPts val="1200"/>
               </a:spcAft>
               <a:buNone/>
             </a:pPr>
             <a:r>
-              <a:rPr lang="en-US" sz="2000" dirty="0">
+              <a:rPr lang="en-US" sz="2400" dirty="0">
                 <a:solidFill>
                   <a:srgbClr val="141B26"/>
                 </a:solidFill>
               </a:rPr>
               <a:t>3. A vaccine prevents a disease. Can it treat someone who already has it?</a:t>
             </a:r>
-            <a:endParaRPr lang="en-US" sz="2000" dirty="0"/>
+            <a:endParaRPr lang="en-US" sz="2400" dirty="0"/>
           </a:p>
         </p:txBody>
       </p:sp>
@@ -5230,8 +5206,8 @@
         </p:nvSpPr>
         <p:spPr>
           <a:xfrm>
-            <a:off x="548640" y="1325880"/>
-            <a:ext cx="5669280" cy="457200"/>
+            <a:off x="548640" y="1280160"/>
+            <a:ext cx="5486400" cy="411480"/>
           </a:xfrm>
           <a:prstGeom prst="rect">
             <a:avLst/>
@@ -5247,14 +5223,14 @@
               <a:buNone/>
             </a:pPr>
             <a:r>
-              <a:rPr lang="en-US" sz="2000" b="1" dirty="0">
+              <a:rPr lang="en-US" sz="2200" b="1" dirty="0">
                 <a:solidFill>
                   <a:srgbClr val="7B3A8E"/>
                 </a:solidFill>
               </a:rPr>
               <a:t>Today I can ...</a:t>
             </a:r>
-            <a:endParaRPr lang="en-US" sz="2000" dirty="0"/>
+            <a:endParaRPr lang="en-US" sz="2200" dirty="0"/>
           </a:p>
         </p:txBody>
       </p:sp>
@@ -5266,8 +5242,8 @@
         </p:nvSpPr>
         <p:spPr>
           <a:xfrm>
-            <a:off x="594360" y="1947672"/>
-            <a:ext cx="292608" cy="292608"/>
+            <a:off x="594360" y="1810512"/>
+            <a:ext cx="310896" cy="310896"/>
           </a:xfrm>
           <a:prstGeom prst="rect">
             <a:avLst/>
@@ -5291,33 +5267,31 @@
         </p:nvSpPr>
         <p:spPr>
           <a:xfrm>
-            <a:off x="1051560" y="1874520"/>
-            <a:ext cx="5120640" cy="868680"/>
-          </a:xfrm>
-          <a:prstGeom prst="rect">
-            <a:avLst/>
-          </a:prstGeom>
-          <a:noFill/>
-          <a:ln/>
-        </p:spPr>
-        <p:txBody>
-          <a:bodyPr wrap="square" lIns="0" tIns="0" rIns="0" bIns="0" rtlCol="0" anchor="t">
-            <a:normAutofit/>
-          </a:bodyPr>
+            <a:off x="1097280" y="1737360"/>
+            <a:ext cx="10332720" cy="868680"/>
+          </a:xfrm>
+          <a:prstGeom prst="rect">
+            <a:avLst/>
+          </a:prstGeom>
+          <a:noFill/>
+          <a:ln/>
+        </p:spPr>
+        <p:txBody>
+          <a:bodyPr wrap="square" lIns="0" tIns="0" rIns="0" bIns="0" rtlCol="0" anchor="t"/>
           <a:lstStyle/>
           <a:p>
             <a:pPr indent="0" marL="0">
               <a:buNone/>
             </a:pPr>
             <a:r>
-              <a:rPr lang="en-US" sz="1600" dirty="0">
+              <a:rPr lang="en-US" sz="2000" dirty="0">
                 <a:solidFill>
                   <a:srgbClr val="141B26"/>
                 </a:solidFill>
               </a:rPr>
               <a:t>I can explain which medicines treat which types of disease, and why antibiotics do not work on viruses.</a:t>
             </a:r>
-            <a:endParaRPr lang="en-US" sz="1600" dirty="0"/>
+            <a:endParaRPr lang="en-US" sz="2000" dirty="0"/>
           </a:p>
         </p:txBody>
       </p:sp>
@@ -5329,8 +5303,8 @@
         </p:nvSpPr>
         <p:spPr>
           <a:xfrm>
-            <a:off x="594360" y="2907792"/>
-            <a:ext cx="292608" cy="292608"/>
+            <a:off x="594360" y="2679192"/>
+            <a:ext cx="310896" cy="310896"/>
           </a:xfrm>
           <a:prstGeom prst="rect">
             <a:avLst/>
@@ -5354,33 +5328,31 @@
         </p:nvSpPr>
         <p:spPr>
           <a:xfrm>
-            <a:off x="1051560" y="2834640"/>
-            <a:ext cx="5120640" cy="868680"/>
-          </a:xfrm>
-          <a:prstGeom prst="rect">
-            <a:avLst/>
-          </a:prstGeom>
-          <a:noFill/>
-          <a:ln/>
-        </p:spPr>
-        <p:txBody>
-          <a:bodyPr wrap="square" lIns="0" tIns="0" rIns="0" bIns="0" rtlCol="0" anchor="t">
-            <a:normAutofit/>
-          </a:bodyPr>
+            <a:off x="1097280" y="2606040"/>
+            <a:ext cx="10332720" cy="868680"/>
+          </a:xfrm>
+          <a:prstGeom prst="rect">
+            <a:avLst/>
+          </a:prstGeom>
+          <a:noFill/>
+          <a:ln/>
+        </p:spPr>
+        <p:txBody>
+          <a:bodyPr wrap="square" lIns="0" tIns="0" rIns="0" bIns="0" rtlCol="0" anchor="t"/>
           <a:lstStyle/>
           <a:p>
             <a:pPr indent="0" marL="0">
               <a:buNone/>
             </a:pPr>
             <a:r>
-              <a:rPr lang="en-US" sz="1600" dirty="0">
+              <a:rPr lang="en-US" sz="2000" dirty="0">
                 <a:solidFill>
                   <a:srgbClr val="141B26"/>
                 </a:solidFill>
               </a:rPr>
               <a:t>I can explain how large amounts of human hormones are made quickly using genetically modified bacteria in a fermenter.</a:t>
             </a:r>
-            <a:endParaRPr lang="en-US" sz="1600" dirty="0"/>
+            <a:endParaRPr lang="en-US" sz="2000" dirty="0"/>
           </a:p>
         </p:txBody>
       </p:sp>
@@ -5392,8 +5364,8 @@
         </p:nvSpPr>
         <p:spPr>
           <a:xfrm>
-            <a:off x="6583680" y="1325880"/>
-            <a:ext cx="5029200" cy="457200"/>
+            <a:off x="548640" y="3611880"/>
+            <a:ext cx="5486400" cy="411480"/>
           </a:xfrm>
           <a:prstGeom prst="rect">
             <a:avLst/>
@@ -5409,14 +5381,14 @@
               <a:buNone/>
             </a:pPr>
             <a:r>
-              <a:rPr lang="en-US" sz="2000" b="1" dirty="0">
+              <a:rPr lang="en-US" sz="2200" b="1" dirty="0">
                 <a:solidFill>
                   <a:srgbClr val="7B3A8E"/>
                 </a:solidFill>
               </a:rPr>
               <a:t>Key words today</a:t>
             </a:r>
-            <a:endParaRPr lang="en-US" sz="2000" dirty="0"/>
+            <a:endParaRPr lang="en-US" sz="2200" dirty="0"/>
           </a:p>
         </p:txBody>
       </p:sp>
@@ -5428,360 +5400,295 @@
         </p:nvSpPr>
         <p:spPr>
           <a:xfrm>
-            <a:off x="6583680" y="1874520"/>
-            <a:ext cx="5029200" cy="4023360"/>
-          </a:xfrm>
-          <a:prstGeom prst="rect">
-            <a:avLst/>
-          </a:prstGeom>
-          <a:noFill/>
-          <a:ln/>
-        </p:spPr>
-        <p:txBody>
-          <a:bodyPr wrap="square" lIns="0" tIns="0" rIns="0" bIns="0" rtlCol="0" anchor="t">
-            <a:normAutofit/>
-          </a:bodyPr>
+            <a:off x="548640" y="4069080"/>
+            <a:ext cx="3515258" cy="1920240"/>
+          </a:xfrm>
+          <a:prstGeom prst="rect">
+            <a:avLst/>
+          </a:prstGeom>
+          <a:noFill/>
+          <a:ln/>
+        </p:spPr>
+        <p:txBody>
+          <a:bodyPr wrap="square" lIns="0" tIns="0" rIns="0" bIns="0" rtlCol="0" anchor="t"/>
+          <a:lstStyle/>
+          <a:p>
+            <a:pPr marL="304800" indent="-304800">
+              <a:spcAft>
+                <a:spcPts val="600"/>
+              </a:spcAft>
+              <a:buSzPct val="100000"/>
+              <a:buChar char="•"/>
+            </a:pPr>
+            <a:r>
+              <a:rPr lang="en-US" sz="2100" b="1" dirty="0">
+                <a:solidFill>
+                  <a:srgbClr val="0F2A5F"/>
+                </a:solidFill>
+              </a:rPr>
+              <a:t>drug</a:t>
+            </a:r>
+            <a:endParaRPr lang="en-US" sz="2100" dirty="0"/>
+          </a:p>
+          <a:p>
+            <a:pPr marL="304800" indent="-304800">
+              <a:spcAft>
+                <a:spcPts val="600"/>
+              </a:spcAft>
+              <a:buSzPct val="100000"/>
+              <a:buChar char="•"/>
+            </a:pPr>
+            <a:r>
+              <a:rPr lang="en-US" sz="2100" b="1" dirty="0">
+                <a:solidFill>
+                  <a:srgbClr val="0F2A5F"/>
+                </a:solidFill>
+              </a:rPr>
+              <a:t>medicine</a:t>
+            </a:r>
+            <a:endParaRPr lang="en-US" sz="2100" dirty="0"/>
+          </a:p>
+          <a:p>
+            <a:pPr marL="304800" indent="-304800">
+              <a:spcAft>
+                <a:spcPts val="600"/>
+              </a:spcAft>
+              <a:buSzPct val="100000"/>
+              <a:buChar char="•"/>
+            </a:pPr>
+            <a:r>
+              <a:rPr lang="en-US" sz="2100" b="1" dirty="0">
+                <a:solidFill>
+                  <a:srgbClr val="0F2A5F"/>
+                </a:solidFill>
+              </a:rPr>
+              <a:t>antibiotic</a:t>
+            </a:r>
+            <a:endParaRPr lang="en-US" sz="2100" dirty="0"/>
+          </a:p>
+          <a:p>
+            <a:pPr marL="304800" indent="-304800">
+              <a:spcAft>
+                <a:spcPts val="600"/>
+              </a:spcAft>
+              <a:buSzPct val="100000"/>
+              <a:buChar char="•"/>
+            </a:pPr>
+            <a:r>
+              <a:rPr lang="en-US" sz="2100" b="1" dirty="0">
+                <a:solidFill>
+                  <a:srgbClr val="0F2A5F"/>
+                </a:solidFill>
+              </a:rPr>
+              <a:t>antiviral</a:t>
+            </a:r>
+            <a:endParaRPr lang="en-US" sz="2100" dirty="0"/>
+          </a:p>
+        </p:txBody>
+      </p:sp>
+      <p:sp>
+        <p:nvSpPr>
+          <p:cNvPr id="12" name="Text 10"/>
+          <p:cNvSpPr txBox="1"/>
+          <p:nvPr/>
+        </p:nvSpPr>
+        <p:spPr>
+          <a:xfrm>
+            <a:off x="4338218" y="4069080"/>
+            <a:ext cx="3515258" cy="1920240"/>
+          </a:xfrm>
+          <a:prstGeom prst="rect">
+            <a:avLst/>
+          </a:prstGeom>
+          <a:noFill/>
+          <a:ln/>
+        </p:spPr>
+        <p:txBody>
+          <a:bodyPr wrap="square" lIns="0" tIns="0" rIns="0" bIns="0" rtlCol="0" anchor="t"/>
+          <a:lstStyle/>
+          <a:p>
+            <a:pPr marL="304800" indent="-304800">
+              <a:spcAft>
+                <a:spcPts val="600"/>
+              </a:spcAft>
+              <a:buSzPct val="100000"/>
+              <a:buChar char="•"/>
+            </a:pPr>
+            <a:r>
+              <a:rPr lang="en-US" sz="2100" b="1" dirty="0">
+                <a:solidFill>
+                  <a:srgbClr val="0F2A5F"/>
+                </a:solidFill>
+              </a:rPr>
+              <a:t>genetic disorder</a:t>
+            </a:r>
+            <a:endParaRPr lang="en-US" sz="2100" dirty="0"/>
+          </a:p>
+          <a:p>
+            <a:pPr marL="304800" indent="-304800">
+              <a:spcAft>
+                <a:spcPts val="600"/>
+              </a:spcAft>
+              <a:buSzPct val="100000"/>
+              <a:buChar char="•"/>
+            </a:pPr>
+            <a:r>
+              <a:rPr lang="en-US" sz="2100" b="1" dirty="0">
+                <a:solidFill>
+                  <a:srgbClr val="0F2A5F"/>
+                </a:solidFill>
+              </a:rPr>
+              <a:t>autoimmune disease</a:t>
+            </a:r>
+            <a:endParaRPr lang="en-US" sz="2100" dirty="0"/>
+          </a:p>
+          <a:p>
+            <a:pPr marL="304800" indent="-304800">
+              <a:spcAft>
+                <a:spcPts val="600"/>
+              </a:spcAft>
+              <a:buSzPct val="100000"/>
+              <a:buChar char="•"/>
+            </a:pPr>
+            <a:r>
+              <a:rPr lang="en-US" sz="2100" b="1" dirty="0">
+                <a:solidFill>
+                  <a:srgbClr val="0F2A5F"/>
+                </a:solidFill>
+              </a:rPr>
+              <a:t>insulin</a:t>
+            </a:r>
+            <a:endParaRPr lang="en-US" sz="2100" dirty="0"/>
+          </a:p>
+          <a:p>
+            <a:pPr marL="304800" indent="-304800">
+              <a:spcAft>
+                <a:spcPts val="600"/>
+              </a:spcAft>
+              <a:buSzPct val="100000"/>
+              <a:buChar char="•"/>
+            </a:pPr>
+            <a:r>
+              <a:rPr lang="en-US" sz="2100" b="1" dirty="0">
+                <a:solidFill>
+                  <a:srgbClr val="0F2A5F"/>
+                </a:solidFill>
+              </a:rPr>
+              <a:t>transgenic</a:t>
+            </a:r>
+            <a:endParaRPr lang="en-US" sz="2100" dirty="0"/>
+          </a:p>
+        </p:txBody>
+      </p:sp>
+      <p:sp>
+        <p:nvSpPr>
+          <p:cNvPr id="13" name="Text 11"/>
+          <p:cNvSpPr txBox="1"/>
+          <p:nvPr/>
+        </p:nvSpPr>
+        <p:spPr>
+          <a:xfrm>
+            <a:off x="8127797" y="4069080"/>
+            <a:ext cx="3515258" cy="1920240"/>
+          </a:xfrm>
+          <a:prstGeom prst="rect">
+            <a:avLst/>
+          </a:prstGeom>
+          <a:noFill/>
+          <a:ln/>
+        </p:spPr>
+        <p:txBody>
+          <a:bodyPr wrap="square" lIns="0" tIns="0" rIns="0" bIns="0" rtlCol="0" anchor="t"/>
+          <a:lstStyle/>
+          <a:p>
+            <a:pPr marL="304800" indent="-304800">
+              <a:spcAft>
+                <a:spcPts val="600"/>
+              </a:spcAft>
+              <a:buSzPct val="100000"/>
+              <a:buChar char="•"/>
+            </a:pPr>
+            <a:r>
+              <a:rPr lang="en-US" sz="2200" b="1" dirty="0">
+                <a:solidFill>
+                  <a:srgbClr val="0F2A5F"/>
+                </a:solidFill>
+              </a:rPr>
+              <a:t>fermenter</a:t>
+            </a:r>
+            <a:endParaRPr lang="en-US" sz="2200" dirty="0"/>
+          </a:p>
+          <a:p>
+            <a:pPr marL="304800" indent="-304800">
+              <a:spcAft>
+                <a:spcPts val="600"/>
+              </a:spcAft>
+              <a:buSzPct val="100000"/>
+              <a:buChar char="•"/>
+            </a:pPr>
+            <a:r>
+              <a:rPr lang="en-US" sz="2200" b="1" dirty="0">
+                <a:solidFill>
+                  <a:srgbClr val="0F2A5F"/>
+                </a:solidFill>
+              </a:rPr>
+              <a:t>sterilise</a:t>
+            </a:r>
+            <a:endParaRPr lang="en-US" sz="2200" dirty="0"/>
+          </a:p>
+          <a:p>
+            <a:pPr marL="304800" indent="-304800">
+              <a:spcAft>
+                <a:spcPts val="600"/>
+              </a:spcAft>
+              <a:buSzPct val="100000"/>
+              <a:buChar char="•"/>
+            </a:pPr>
+            <a:r>
+              <a:rPr lang="en-US" sz="2200" b="1" dirty="0">
+                <a:solidFill>
+                  <a:srgbClr val="0F2A5F"/>
+                </a:solidFill>
+              </a:rPr>
+              <a:t>aseptic</a:t>
+            </a:r>
+            <a:endParaRPr lang="en-US" sz="2200" dirty="0"/>
+          </a:p>
+        </p:txBody>
+      </p:sp>
+      <p:sp>
+        <p:nvSpPr>
+          <p:cNvPr id="14" name="Text 12"/>
+          <p:cNvSpPr txBox="1"/>
+          <p:nvPr/>
+        </p:nvSpPr>
+        <p:spPr>
+          <a:xfrm>
+            <a:off x="548640" y="6035040"/>
+            <a:ext cx="10881360" cy="320040"/>
+          </a:xfrm>
+          <a:prstGeom prst="rect">
+            <a:avLst/>
+          </a:prstGeom>
+          <a:noFill/>
+          <a:ln/>
+        </p:spPr>
+        <p:txBody>
+          <a:bodyPr wrap="square" lIns="0" tIns="0" rIns="0" bIns="0" rtlCol="0" anchor="ctr"/>
           <a:lstStyle/>
           <a:p>
             <a:pPr indent="0" marL="0">
-              <a:spcAft>
-                <a:spcPts val="500"/>
-              </a:spcAft>
-              <a:buNone/>
-            </a:pPr>
-            <a:r>
-              <a:rPr lang="en-US" sz="1300" b="1" dirty="0">
-                <a:solidFill>
-                  <a:srgbClr val="0F2A5F"/>
-                </a:solidFill>
-              </a:rPr>
-              <a:t>drug</a:t>
-            </a:r>
-            <a:pPr indent="0" marL="0">
-              <a:spcAft>
-                <a:spcPts val="500"/>
-              </a:spcAft>
-              <a:buNone/>
-            </a:pPr>
-            <a:r>
-              <a:rPr lang="en-US" sz="1300" dirty="0">
-                <a:solidFill>
-                  <a:srgbClr val="141B26"/>
-                </a:solidFill>
-              </a:rPr>
-              <a:t>  a substance that affects how the body works</a:t>
-            </a:r>
-            <a:endParaRPr lang="en-US" sz="1300" dirty="0"/>
-          </a:p>
-          <a:p>
-            <a:pPr indent="0" marL="0">
-              <a:spcAft>
-                <a:spcPts val="500"/>
-              </a:spcAft>
-              <a:buNone/>
-            </a:pPr>
-            <a:r>
-              <a:rPr lang="en-US" sz="1300" b="1" dirty="0">
-                <a:solidFill>
-                  <a:srgbClr val="0F2A5F"/>
-                </a:solidFill>
-              </a:rPr>
-              <a:t>medicine</a:t>
-            </a:r>
-            <a:pPr indent="0" marL="0">
-              <a:spcAft>
-                <a:spcPts val="500"/>
-              </a:spcAft>
-              <a:buNone/>
-            </a:pPr>
-            <a:r>
-              <a:rPr lang="en-US" sz="1300" dirty="0">
-                <a:solidFill>
-                  <a:srgbClr val="141B26"/>
-                </a:solidFill>
-              </a:rPr>
-              <a:t>  a drug used to treat or prevent disease</a:t>
-            </a:r>
-            <a:endParaRPr lang="en-US" sz="1300" dirty="0"/>
-          </a:p>
-          <a:p>
-            <a:pPr indent="0" marL="0">
-              <a:spcAft>
-                <a:spcPts val="500"/>
-              </a:spcAft>
-              <a:buNone/>
-            </a:pPr>
-            <a:r>
-              <a:rPr lang="en-US" sz="1300" b="1" dirty="0">
-                <a:solidFill>
-                  <a:srgbClr val="0F2A5F"/>
-                </a:solidFill>
-              </a:rPr>
-              <a:t>antibiotic</a:t>
-            </a:r>
-            <a:pPr indent="0" marL="0">
-              <a:spcAft>
-                <a:spcPts val="500"/>
-              </a:spcAft>
-              <a:buNone/>
-            </a:pPr>
-            <a:r>
-              <a:rPr lang="en-US" sz="1300" dirty="0">
-                <a:solidFill>
-                  <a:srgbClr val="141B26"/>
-                </a:solidFill>
-              </a:rPr>
-              <a:t>  a medicine that kills bacteria</a:t>
-            </a:r>
-            <a:endParaRPr lang="en-US" sz="1300" dirty="0"/>
-          </a:p>
-          <a:p>
-            <a:pPr indent="0" marL="0">
-              <a:spcAft>
-                <a:spcPts val="500"/>
-              </a:spcAft>
-              <a:buNone/>
-            </a:pPr>
-            <a:r>
-              <a:rPr lang="en-US" sz="1300" b="1" dirty="0">
-                <a:solidFill>
-                  <a:srgbClr val="0F2A5F"/>
-                </a:solidFill>
-              </a:rPr>
-              <a:t>antiviral</a:t>
-            </a:r>
-            <a:pPr indent="0" marL="0">
-              <a:spcAft>
-                <a:spcPts val="500"/>
-              </a:spcAft>
-              <a:buNone/>
-            </a:pPr>
-            <a:r>
-              <a:rPr lang="en-US" sz="1300" dirty="0">
-                <a:solidFill>
-                  <a:srgbClr val="141B26"/>
-                </a:solidFill>
-              </a:rPr>
-              <a:t>  a medicine that stops viruses replicating (copying themselves)</a:t>
-            </a:r>
-            <a:endParaRPr lang="en-US" sz="1300" dirty="0"/>
-          </a:p>
-          <a:p>
-            <a:pPr indent="0" marL="0">
-              <a:spcAft>
-                <a:spcPts val="500"/>
-              </a:spcAft>
-              <a:buNone/>
-            </a:pPr>
-            <a:r>
-              <a:rPr lang="en-US" sz="1300" b="1" dirty="0">
-                <a:solidFill>
-                  <a:srgbClr val="0F2A5F"/>
-                </a:solidFill>
-              </a:rPr>
-              <a:t>genetic disorder</a:t>
-            </a:r>
-            <a:pPr indent="0" marL="0">
-              <a:spcAft>
-                <a:spcPts val="500"/>
-              </a:spcAft>
-              <a:buNone/>
-            </a:pPr>
-            <a:r>
-              <a:rPr lang="en-US" sz="1300" dirty="0">
-                <a:solidFill>
-                  <a:srgbClr val="141B26"/>
-                </a:solidFill>
-              </a:rPr>
-              <a:t>  a disease caused by faulty genes that a person is born with</a:t>
-            </a:r>
-            <a:endParaRPr lang="en-US" sz="1300" dirty="0"/>
-          </a:p>
-          <a:p>
-            <a:pPr indent="0" marL="0">
-              <a:spcAft>
-                <a:spcPts val="500"/>
-              </a:spcAft>
-              <a:buNone/>
-            </a:pPr>
-            <a:r>
-              <a:rPr lang="en-US" sz="1300" b="1" dirty="0">
-                <a:solidFill>
-                  <a:srgbClr val="0F2A5F"/>
-                </a:solidFill>
-              </a:rPr>
-              <a:t>autoimmune disease</a:t>
-            </a:r>
-            <a:pPr indent="0" marL="0">
-              <a:spcAft>
-                <a:spcPts val="500"/>
-              </a:spcAft>
-              <a:buNone/>
-            </a:pPr>
-            <a:r>
-              <a:rPr lang="en-US" sz="1300" dirty="0">
-                <a:solidFill>
-                  <a:srgbClr val="141B26"/>
-                </a:solidFill>
-              </a:rPr>
-              <a:t>  a disease in which white blood cells attack the body's own cells</a:t>
-            </a:r>
-            <a:endParaRPr lang="en-US" sz="1300" dirty="0"/>
-          </a:p>
-          <a:p>
-            <a:pPr indent="0" marL="0">
-              <a:spcAft>
-                <a:spcPts val="500"/>
-              </a:spcAft>
-              <a:buNone/>
-            </a:pPr>
-            <a:r>
-              <a:rPr lang="en-US" sz="1300" b="1" dirty="0">
-                <a:solidFill>
-                  <a:srgbClr val="0F2A5F"/>
-                </a:solidFill>
-              </a:rPr>
-              <a:t>insulin</a:t>
-            </a:r>
-            <a:pPr indent="0" marL="0">
-              <a:spcAft>
-                <a:spcPts val="500"/>
-              </a:spcAft>
-              <a:buNone/>
-            </a:pPr>
-            <a:r>
-              <a:rPr lang="en-US" sz="1300" dirty="0">
-                <a:solidFill>
-                  <a:srgbClr val="141B26"/>
-                </a:solidFill>
-              </a:rPr>
-              <a:t>  a hormone made in the pancreas that lowers blood glucose</a:t>
-            </a:r>
-            <a:endParaRPr lang="en-US" sz="1300" dirty="0"/>
-          </a:p>
-          <a:p>
-            <a:pPr indent="0" marL="0">
-              <a:spcAft>
-                <a:spcPts val="500"/>
-              </a:spcAft>
-              <a:buNone/>
-            </a:pPr>
-            <a:r>
-              <a:rPr lang="en-US" sz="1300" b="1" dirty="0">
-                <a:solidFill>
-                  <a:srgbClr val="0F2A5F"/>
-                </a:solidFill>
-              </a:rPr>
-              <a:t>transgenic</a:t>
-            </a:r>
-            <a:pPr indent="0" marL="0">
-              <a:spcAft>
-                <a:spcPts val="500"/>
-              </a:spcAft>
-              <a:buNone/>
-            </a:pPr>
-            <a:r>
-              <a:rPr lang="en-US" sz="1300" dirty="0">
-                <a:solidFill>
-                  <a:srgbClr val="141B26"/>
-                </a:solidFill>
-              </a:rPr>
-              <a:t>  contains DNA from more than one species</a:t>
-            </a:r>
-            <a:endParaRPr lang="en-US" sz="1300" dirty="0"/>
-          </a:p>
-          <a:p>
-            <a:pPr indent="0" marL="0">
-              <a:spcAft>
-                <a:spcPts val="500"/>
-              </a:spcAft>
-              <a:buNone/>
-            </a:pPr>
-            <a:r>
-              <a:rPr lang="en-US" sz="1300" b="1" dirty="0">
-                <a:solidFill>
-                  <a:srgbClr val="0F2A5F"/>
-                </a:solidFill>
-              </a:rPr>
-              <a:t>fermenter</a:t>
-            </a:r>
-            <a:pPr indent="0" marL="0">
-              <a:spcAft>
-                <a:spcPts val="500"/>
-              </a:spcAft>
-              <a:buNone/>
-            </a:pPr>
-            <a:r>
-              <a:rPr lang="en-US" sz="1300" dirty="0">
-                <a:solidFill>
-                  <a:srgbClr val="141B26"/>
-                </a:solidFill>
-              </a:rPr>
-              <a:t>  a large container in which microorganisms are grown</a:t>
-            </a:r>
-            <a:endParaRPr lang="en-US" sz="1300" dirty="0"/>
-          </a:p>
-          <a:p>
-            <a:pPr indent="0" marL="0">
-              <a:spcAft>
-                <a:spcPts val="500"/>
-              </a:spcAft>
-              <a:buNone/>
-            </a:pPr>
-            <a:r>
-              <a:rPr lang="en-US" sz="1300" b="1" dirty="0">
-                <a:solidFill>
-                  <a:srgbClr val="0F2A5F"/>
-                </a:solidFill>
-              </a:rPr>
-              <a:t>sterilise</a:t>
-            </a:r>
-            <a:pPr indent="0" marL="0">
-              <a:spcAft>
-                <a:spcPts val="500"/>
-              </a:spcAft>
-              <a:buNone/>
-            </a:pPr>
-            <a:r>
-              <a:rPr lang="en-US" sz="1300" dirty="0">
-                <a:solidFill>
-                  <a:srgbClr val="141B26"/>
-                </a:solidFill>
-              </a:rPr>
-              <a:t>  kill all the microorganisms in or on something</a:t>
-            </a:r>
-            <a:endParaRPr lang="en-US" sz="1300" dirty="0"/>
-          </a:p>
-          <a:p>
-            <a:pPr indent="0" marL="0">
-              <a:spcAft>
-                <a:spcPts val="500"/>
-              </a:spcAft>
-              <a:buNone/>
-            </a:pPr>
-            <a:r>
-              <a:rPr lang="en-US" sz="1300" b="1" dirty="0">
-                <a:solidFill>
-                  <a:srgbClr val="0F2A5F"/>
-                </a:solidFill>
-              </a:rPr>
-              <a:t>aseptic</a:t>
-            </a:r>
-            <a:pPr indent="0" marL="0">
-              <a:spcAft>
-                <a:spcPts val="500"/>
-              </a:spcAft>
-              <a:buNone/>
-            </a:pPr>
-            <a:r>
-              <a:rPr lang="en-US" sz="1300" dirty="0">
-                <a:solidFill>
-                  <a:srgbClr val="141B26"/>
-                </a:solidFill>
-              </a:rPr>
-              <a:t>  free from unwanted microorganisms</a:t>
-            </a:r>
-            <a:endParaRPr lang="en-US" sz="1300" dirty="0"/>
+              <a:buNone/>
+            </a:pPr>
+            <a:r>
+              <a:rPr lang="en-US" sz="1400" i="1" dirty="0">
+                <a:solidFill>
+                  <a:srgbClr val="5B6574"/>
+                </a:solidFill>
+              </a:rPr>
+              <a:t>Meanings are in the key words box on your worksheet.</a:t>
+            </a:r>
+            <a:endParaRPr lang="en-US" sz="1400" dirty="0"/>
           </a:p>
         </p:txBody>
       </p:sp>
@@ -5965,32 +5872,30 @@
         <p:spPr>
           <a:xfrm>
             <a:off x="548640" y="1371600"/>
-            <a:ext cx="5394960" cy="2377440"/>
-          </a:xfrm>
-          <a:prstGeom prst="rect">
-            <a:avLst/>
-          </a:prstGeom>
-          <a:noFill/>
-          <a:ln/>
-        </p:spPr>
-        <p:txBody>
-          <a:bodyPr wrap="square" lIns="0" tIns="0" rIns="0" bIns="0" rtlCol="0" anchor="t">
-            <a:normAutofit/>
-          </a:bodyPr>
+            <a:ext cx="5394960" cy="2651760"/>
+          </a:xfrm>
+          <a:prstGeom prst="rect">
+            <a:avLst/>
+          </a:prstGeom>
+          <a:noFill/>
+          <a:ln/>
+        </p:spPr>
+        <p:txBody>
+          <a:bodyPr wrap="square" lIns="0" tIns="0" rIns="0" bIns="0" rtlCol="0" anchor="t"/>
           <a:lstStyle/>
           <a:p>
             <a:pPr indent="0" marL="0">
               <a:buNone/>
             </a:pPr>
             <a:r>
-              <a:rPr lang="en-US" sz="2800" b="1" dirty="0">
+              <a:rPr lang="en-US" sz="2900" b="1" dirty="0">
                 <a:solidFill>
                   <a:srgbClr val="0F2A5F"/>
                 </a:solidFill>
               </a:rPr>
               <a:t>In 1928, Alexander Fleming noticed that a mould had killed the bacteria growing around it on a dish he had forgotten to wash up. What had the mould made?</a:t>
             </a:r>
-            <a:endParaRPr lang="en-US" sz="2800" dirty="0"/>
+            <a:endParaRPr lang="en-US" sz="2900" dirty="0"/>
           </a:p>
         </p:txBody>
       </p:sp>
@@ -6002,19 +5907,17 @@
         </p:nvSpPr>
         <p:spPr>
           <a:xfrm>
-            <a:off x="548640" y="3794760"/>
-            <a:ext cx="5394960" cy="2103120"/>
-          </a:xfrm>
-          <a:prstGeom prst="rect">
-            <a:avLst/>
-          </a:prstGeom>
-          <a:noFill/>
-          <a:ln/>
-        </p:spPr>
-        <p:txBody>
-          <a:bodyPr wrap="square" lIns="0" tIns="0" rIns="0" bIns="0" rtlCol="0" anchor="t">
-            <a:normAutofit/>
-          </a:bodyPr>
+            <a:off x="548640" y="4114800"/>
+            <a:ext cx="5394960" cy="1828800"/>
+          </a:xfrm>
+          <a:prstGeom prst="rect">
+            <a:avLst/>
+          </a:prstGeom>
+          <a:noFill/>
+          <a:ln/>
+        </p:spPr>
+        <p:txBody>
+          <a:bodyPr wrap="square" lIns="0" tIns="0" rIns="0" bIns="0" rtlCol="0" anchor="t"/>
           <a:lstStyle/>
           <a:p>
             <a:pPr indent="0" marL="0">
@@ -6024,14 +5927,14 @@
               <a:buNone/>
             </a:pPr>
             <a:r>
-              <a:rPr lang="en-US" sz="1600" dirty="0">
+              <a:rPr lang="en-US" sz="2000" dirty="0">
                 <a:solidFill>
                   <a:srgbClr val="141B26"/>
                 </a:solidFill>
               </a:rPr>
               <a:t>Talk to a partner: why might a mould make a substance that kills bacteria?</a:t>
             </a:r>
-            <a:endParaRPr lang="en-US" sz="1600" dirty="0"/>
+            <a:endParaRPr lang="en-US" sz="2000" dirty="0"/>
           </a:p>
         </p:txBody>
       </p:sp>
@@ -6068,7 +5971,7 @@
         <p:spPr>
           <a:xfrm>
             <a:off x="6309360" y="5532120"/>
-            <a:ext cx="5303520" cy="502920"/>
+            <a:ext cx="5303520" cy="548640"/>
           </a:xfrm>
           <a:prstGeom prst="rect">
             <a:avLst/>
@@ -6084,7 +5987,7 @@
               <a:buNone/>
             </a:pPr>
             <a:r>
-              <a:rPr lang="en-US" sz="1100" dirty="0">
+              <a:rPr lang="en-US" sz="1300" dirty="0">
                 <a:solidFill>
                   <a:srgbClr val="141B26"/>
                 </a:solidFill>
@@ -6094,21 +5997,21 @@
             <a:pPr algn="l" indent="0" marL="0">
               <a:buNone/>
             </a:pPr>
-            <a:endParaRPr lang="en-US" sz="1100" dirty="0"/>
+            <a:endParaRPr lang="en-US" sz="1300" dirty="0"/>
           </a:p>
           <a:p>
             <a:pPr algn="l" indent="0" marL="0">
               <a:buNone/>
             </a:pPr>
             <a:r>
-              <a:rPr lang="en-US" sz="800" dirty="0">
+              <a:rPr lang="en-US" sz="900" dirty="0">
                 <a:solidFill>
                   <a:srgbClr val="5B6574"/>
                 </a:solidFill>
               </a:rPr>
               <a:t>Image: gailhampshire, CC BY 2.0, via Wikimedia Commons</a:t>
             </a:r>
-            <a:endParaRPr lang="en-US" sz="1100" dirty="0"/>
+            <a:endParaRPr lang="en-US" sz="1300" dirty="0"/>
           </a:p>
         </p:txBody>
       </p:sp>
@@ -6291,8 +6194,8 @@
         </p:nvSpPr>
         <p:spPr>
           <a:xfrm>
-            <a:off x="548640" y="6053328"/>
-            <a:ext cx="9601200" cy="292608"/>
+            <a:off x="548640" y="6035040"/>
+            <a:ext cx="9601200" cy="310896"/>
           </a:xfrm>
           <a:prstGeom prst="rect">
             <a:avLst/>
@@ -6308,7 +6211,7 @@
               <a:buNone/>
             </a:pPr>
             <a:r>
-              <a:rPr lang="en-US" sz="1200" b="1" dirty="0">
+              <a:rPr lang="en-US" sz="1400" b="1" dirty="0">
                 <a:solidFill>
                   <a:srgbClr val="7B3A8E"/>
                 </a:solidFill>
@@ -6319,14 +6222,14 @@
               <a:buNone/>
             </a:pPr>
             <a:r>
-              <a:rPr lang="en-US" sz="1200" dirty="0">
+              <a:rPr lang="en-US" sz="1400" dirty="0">
                 <a:solidFill>
                   <a:srgbClr val="7B3A8E"/>
                 </a:solidFill>
               </a:rPr>
               <a:t>drug   ·   medicine   ·   antibiotic   ·   antiviral</a:t>
             </a:r>
-            <a:endParaRPr lang="en-US" sz="1200" dirty="0"/>
+            <a:endParaRPr lang="en-US" sz="1400" dirty="0"/>
           </a:p>
         </p:txBody>
       </p:sp>
@@ -6348,81 +6251,79 @@
           <a:ln/>
         </p:spPr>
         <p:txBody>
-          <a:bodyPr wrap="square" lIns="0" tIns="0" rIns="0" bIns="0" rtlCol="0" anchor="t">
-            <a:normAutofit/>
-          </a:bodyPr>
-          <a:lstStyle/>
-          <a:p>
-            <a:pPr marL="228600" indent="-228600">
+          <a:bodyPr wrap="square" lIns="0" tIns="0" rIns="0" bIns="0" rtlCol="0" anchor="t"/>
+          <a:lstStyle/>
+          <a:p>
+            <a:pPr marL="304800" indent="-304800">
               <a:spcAft>
-                <a:spcPts val="600"/>
+                <a:spcPts val="800"/>
               </a:spcAft>
               <a:buSzPct val="100000"/>
               <a:buChar char="•"/>
             </a:pPr>
             <a:r>
-              <a:rPr lang="en-US" sz="1700" dirty="0">
+              <a:rPr lang="en-US" sz="2000" dirty="0">
                 <a:solidFill>
                   <a:srgbClr val="141B26"/>
                 </a:solidFill>
               </a:rPr>
               <a:t>A drug is any substance that affects how the body works.</a:t>
             </a:r>
-            <a:endParaRPr lang="en-US" sz="1700" dirty="0"/>
-          </a:p>
-          <a:p>
-            <a:pPr marL="228600" indent="-228600">
+            <a:endParaRPr lang="en-US" sz="2000" dirty="0"/>
+          </a:p>
+          <a:p>
+            <a:pPr marL="304800" indent="-304800">
               <a:spcAft>
-                <a:spcPts val="600"/>
+                <a:spcPts val="800"/>
               </a:spcAft>
               <a:buSzPct val="100000"/>
               <a:buChar char="•"/>
             </a:pPr>
             <a:r>
-              <a:rPr lang="en-US" sz="1700" dirty="0">
+              <a:rPr lang="en-US" sz="2000" dirty="0">
                 <a:solidFill>
                   <a:srgbClr val="141B26"/>
                 </a:solidFill>
               </a:rPr>
               <a:t>Medicines are drugs used to treat or prevent disease.</a:t>
             </a:r>
-            <a:endParaRPr lang="en-US" sz="1700" dirty="0"/>
-          </a:p>
-          <a:p>
-            <a:pPr marL="228600" indent="-228600">
+            <a:endParaRPr lang="en-US" sz="2000" dirty="0"/>
+          </a:p>
+          <a:p>
+            <a:pPr marL="304800" indent="-304800">
               <a:spcAft>
-                <a:spcPts val="600"/>
+                <a:spcPts val="800"/>
               </a:spcAft>
               <a:buSzPct val="100000"/>
               <a:buChar char="•"/>
             </a:pPr>
             <a:r>
-              <a:rPr lang="en-US" sz="1700" dirty="0">
+              <a:rPr lang="en-US" sz="2000" dirty="0">
                 <a:solidFill>
                   <a:srgbClr val="141B26"/>
                 </a:solidFill>
               </a:rPr>
               <a:t>Antibiotics kill bacteria. Antivirals stop viruses replicating.</a:t>
             </a:r>
-            <a:endParaRPr lang="en-US" sz="1700" dirty="0"/>
-          </a:p>
-          <a:p>
-            <a:pPr marL="228600" indent="-228600">
+            <a:endParaRPr lang="en-US" sz="2000" dirty="0"/>
+          </a:p>
+          <a:p>
+            <a:pPr marL="304800" indent="-304800">
               <a:spcAft>
-                <a:spcPts val="600"/>
+                <a:spcPts val="800"/>
               </a:spcAft>
               <a:buSzPct val="100000"/>
               <a:buChar char="•"/>
             </a:pPr>
             <a:r>
-              <a:rPr lang="en-US" sz="1700" dirty="0">
+              <a:rPr lang="en-US" sz="2000" dirty="0">
                 <a:solidFill>
                   <a:srgbClr val="141B26"/>
                 </a:solidFill>
               </a:rPr>
               <a:t>Vaccines prevent infections. Deficiency diseases are treated by adding the missing nutrient to the diet.</a:t>
             </a:r>
-            <a:endParaRPr lang="en-US" sz="1700" dirty="0"/>
+            <a:endParaRPr lang="en-US" sz="2000" dirty="0"/>
           </a:p>
         </p:txBody>
       </p:sp>
@@ -6459,7 +6360,7 @@
         <p:spPr>
           <a:xfrm>
             <a:off x="6583680" y="4983480"/>
-            <a:ext cx="5029200" cy="502920"/>
+            <a:ext cx="5029200" cy="548640"/>
           </a:xfrm>
           <a:prstGeom prst="rect">
             <a:avLst/>
@@ -6475,7 +6376,7 @@
               <a:buNone/>
             </a:pPr>
             <a:r>
-              <a:rPr lang="en-US" sz="1100" dirty="0">
+              <a:rPr lang="en-US" sz="1300" dirty="0">
                 <a:solidFill>
                   <a:srgbClr val="141B26"/>
                 </a:solidFill>
@@ -6485,21 +6386,21 @@
             <a:pPr algn="l" indent="0" marL="0">
               <a:buNone/>
             </a:pPr>
-            <a:endParaRPr lang="en-US" sz="1100" dirty="0"/>
+            <a:endParaRPr lang="en-US" sz="1300" dirty="0"/>
           </a:p>
           <a:p>
             <a:pPr algn="l" indent="0" marL="0">
               <a:buNone/>
             </a:pPr>
             <a:r>
-              <a:rPr lang="en-US" sz="800" dirty="0">
+              <a:rPr lang="en-US" sz="900" dirty="0">
                 <a:solidFill>
                   <a:srgbClr val="5B6574"/>
                 </a:solidFill>
               </a:rPr>
               <a:t>Image: Sheep purple, CC BY 2.0, via Wikimedia Commons</a:t>
             </a:r>
-            <a:endParaRPr lang="en-US" sz="1100" dirty="0"/>
+            <a:endParaRPr lang="en-US" sz="1300" dirty="0"/>
           </a:p>
         </p:txBody>
       </p:sp>
@@ -6546,16 +6447,14 @@
           <a:ln/>
         </p:spPr>
         <p:txBody>
-          <a:bodyPr wrap="square" lIns="0" tIns="0" rIns="0" bIns="0" rtlCol="0" anchor="ctr">
-            <a:normAutofit/>
-          </a:bodyPr>
+          <a:bodyPr wrap="square" lIns="0" tIns="0" rIns="0" bIns="0" rtlCol="0" anchor="ctr"/>
           <a:lstStyle/>
           <a:p>
             <a:pPr indent="0" marL="0">
               <a:buNone/>
             </a:pPr>
             <a:r>
-              <a:rPr lang="en-US" sz="1400" b="1" dirty="0">
+              <a:rPr lang="en-US" sz="1700" b="1" dirty="0">
                 <a:solidFill>
                   <a:srgbClr val="7B3A8E"/>
                 </a:solidFill>
@@ -6566,14 +6465,14 @@
               <a:buNone/>
             </a:pPr>
             <a:r>
-              <a:rPr lang="en-US" sz="1400" dirty="0">
+              <a:rPr lang="en-US" sz="1700" dirty="0">
                 <a:solidFill>
                   <a:srgbClr val="141B26"/>
                 </a:solidFill>
               </a:rPr>
               <a:t>Antibiotics do not work on viruses.</a:t>
             </a:r>
-            <a:endParaRPr lang="en-US" sz="1400" dirty="0"/>
+            <a:endParaRPr lang="en-US" sz="1700" dirty="0"/>
           </a:p>
         </p:txBody>
       </p:sp>
@@ -6756,8 +6655,8 @@
         </p:nvSpPr>
         <p:spPr>
           <a:xfrm>
-            <a:off x="548640" y="6053328"/>
-            <a:ext cx="9601200" cy="292608"/>
+            <a:off x="548640" y="6035040"/>
+            <a:ext cx="9601200" cy="310896"/>
           </a:xfrm>
           <a:prstGeom prst="rect">
             <a:avLst/>
@@ -6773,7 +6672,7 @@
               <a:buNone/>
             </a:pPr>
             <a:r>
-              <a:rPr lang="en-US" sz="1200" b="1" dirty="0">
+              <a:rPr lang="en-US" sz="1400" b="1" dirty="0">
                 <a:solidFill>
                   <a:srgbClr val="7B3A8E"/>
                 </a:solidFill>
@@ -6784,14 +6683,14 @@
               <a:buNone/>
             </a:pPr>
             <a:r>
-              <a:rPr lang="en-US" sz="1200" dirty="0">
+              <a:rPr lang="en-US" sz="1400" dirty="0">
                 <a:solidFill>
                   <a:srgbClr val="7B3A8E"/>
                 </a:solidFill>
               </a:rPr>
               <a:t>genetic disorder   ·   autoimmune disease   ·   insulin</a:t>
             </a:r>
-            <a:endParaRPr lang="en-US" sz="1200" dirty="0"/>
+            <a:endParaRPr lang="en-US" sz="1400" dirty="0"/>
           </a:p>
         </p:txBody>
       </p:sp>
@@ -6813,81 +6712,79 @@
           <a:ln/>
         </p:spPr>
         <p:txBody>
-          <a:bodyPr wrap="square" lIns="0" tIns="0" rIns="0" bIns="0" rtlCol="0" anchor="t">
-            <a:normAutofit/>
-          </a:bodyPr>
-          <a:lstStyle/>
-          <a:p>
-            <a:pPr marL="228600" indent="-228600">
+          <a:bodyPr wrap="square" lIns="0" tIns="0" rIns="0" bIns="0" rtlCol="0" anchor="t"/>
+          <a:lstStyle/>
+          <a:p>
+            <a:pPr marL="304800" indent="-304800">
               <a:spcAft>
-                <a:spcPts val="600"/>
+                <a:spcPts val="800"/>
               </a:spcAft>
               <a:buSzPct val="100000"/>
               <a:buChar char="•"/>
             </a:pPr>
             <a:r>
-              <a:rPr lang="en-US" sz="1600" dirty="0">
+              <a:rPr lang="en-US" sz="1900" dirty="0">
                 <a:solidFill>
                   <a:srgbClr val="141B26"/>
                 </a:solidFill>
               </a:rPr>
               <a:t>Genetic disorders: faulty genes from birth, e.g. sickle cell anaemia. Treatment may last a lifetime.</a:t>
             </a:r>
-            <a:endParaRPr lang="en-US" sz="1700" dirty="0"/>
-          </a:p>
-          <a:p>
-            <a:pPr marL="228600" indent="-228600">
+            <a:endParaRPr lang="en-US" sz="1900" dirty="0"/>
+          </a:p>
+          <a:p>
+            <a:pPr marL="304800" indent="-304800">
               <a:spcAft>
-                <a:spcPts val="600"/>
+                <a:spcPts val="800"/>
               </a:spcAft>
               <a:buSzPct val="100000"/>
               <a:buChar char="•"/>
             </a:pPr>
             <a:r>
-              <a:rPr lang="en-US" sz="1600" dirty="0">
+              <a:rPr lang="en-US" sz="1900" dirty="0">
                 <a:solidFill>
                   <a:srgbClr val="141B26"/>
                 </a:solidFill>
               </a:rPr>
               <a:t>Autoimmune diseases: white blood cells attack the body.</a:t>
             </a:r>
-            <a:endParaRPr lang="en-US" sz="1700" dirty="0"/>
-          </a:p>
-          <a:p>
-            <a:pPr marL="228600" indent="-228600">
+            <a:endParaRPr lang="en-US" sz="1900" dirty="0"/>
+          </a:p>
+          <a:p>
+            <a:pPr marL="304800" indent="-304800">
               <a:spcAft>
-                <a:spcPts val="600"/>
+                <a:spcPts val="800"/>
               </a:spcAft>
               <a:buSzPct val="100000"/>
               <a:buChar char="•"/>
             </a:pPr>
             <a:r>
-              <a:rPr lang="en-US" sz="1600" dirty="0">
+              <a:rPr lang="en-US" sz="1900" dirty="0">
                 <a:solidFill>
                   <a:srgbClr val="141B26"/>
                 </a:solidFill>
               </a:rPr>
               <a:t>Type 1 diabetes: the insulin-making tissue in the pancreas is destroyed. High blood glucose damages organs.</a:t>
             </a:r>
-            <a:endParaRPr lang="en-US" sz="1700" dirty="0"/>
-          </a:p>
-          <a:p>
-            <a:pPr marL="228600" indent="-228600">
+            <a:endParaRPr lang="en-US" sz="1900" dirty="0"/>
+          </a:p>
+          <a:p>
+            <a:pPr marL="304800" indent="-304800">
               <a:spcAft>
-                <a:spcPts val="600"/>
+                <a:spcPts val="800"/>
               </a:spcAft>
               <a:buSzPct val="100000"/>
               <a:buChar char="•"/>
             </a:pPr>
             <a:r>
-              <a:rPr lang="en-US" sz="1600" dirty="0">
+              <a:rPr lang="en-US" sz="1900" dirty="0">
                 <a:solidFill>
                   <a:srgbClr val="141B26"/>
                 </a:solidFill>
               </a:rPr>
               <a:t>Treatment: inject the missing hormone.</a:t>
             </a:r>
-            <a:endParaRPr lang="en-US" sz="1700" dirty="0"/>
+            <a:endParaRPr lang="en-US" sz="1900" dirty="0"/>
           </a:p>
         </p:txBody>
       </p:sp>
@@ -6958,16 +6855,14 @@
           <a:ln/>
         </p:spPr>
         <p:txBody>
-          <a:bodyPr wrap="square" lIns="0" tIns="0" rIns="0" bIns="0" rtlCol="0" anchor="ctr">
-            <a:normAutofit/>
-          </a:bodyPr>
+          <a:bodyPr wrap="square" lIns="0" tIns="0" rIns="0" bIns="0" rtlCol="0" anchor="ctr"/>
           <a:lstStyle/>
           <a:p>
             <a:pPr indent="0" marL="0">
               <a:buNone/>
             </a:pPr>
             <a:r>
-              <a:rPr lang="en-US" sz="1400" b="1" dirty="0">
+              <a:rPr lang="en-US" sz="1700" b="1" dirty="0">
                 <a:solidFill>
                   <a:srgbClr val="7B3A8E"/>
                 </a:solidFill>
@@ -6978,14 +6873,14 @@
               <a:buNone/>
             </a:pPr>
             <a:r>
-              <a:rPr lang="en-US" sz="1400" dirty="0">
+              <a:rPr lang="en-US" sz="1700" dirty="0">
                 <a:solidFill>
                   <a:srgbClr val="141B26"/>
                 </a:solidFill>
               </a:rPr>
               <a:t>Some diseases cannot be cured, but a missing hormone can be replaced.</a:t>
             </a:r>
-            <a:endParaRPr lang="en-US" sz="1400" dirty="0"/>
+            <a:endParaRPr lang="en-US" sz="1700" dirty="0"/>
           </a:p>
         </p:txBody>
       </p:sp>
@@ -7168,8 +7063,8 @@
         </p:nvSpPr>
         <p:spPr>
           <a:xfrm>
-            <a:off x="548640" y="6053328"/>
-            <a:ext cx="9601200" cy="292608"/>
+            <a:off x="548640" y="6035040"/>
+            <a:ext cx="9601200" cy="310896"/>
           </a:xfrm>
           <a:prstGeom prst="rect">
             <a:avLst/>
@@ -7185,7 +7080,7 @@
               <a:buNone/>
             </a:pPr>
             <a:r>
-              <a:rPr lang="en-US" sz="1200" b="1" dirty="0">
+              <a:rPr lang="en-US" sz="1400" b="1" dirty="0">
                 <a:solidFill>
                   <a:srgbClr val="7B3A8E"/>
                 </a:solidFill>
@@ -7196,14 +7091,14 @@
               <a:buNone/>
             </a:pPr>
             <a:r>
-              <a:rPr lang="en-US" sz="1200" dirty="0">
+              <a:rPr lang="en-US" sz="1400" dirty="0">
                 <a:solidFill>
                   <a:srgbClr val="7B3A8E"/>
                 </a:solidFill>
               </a:rPr>
               <a:t>transgenic</a:t>
             </a:r>
-            <a:endParaRPr lang="en-US" sz="1200" dirty="0"/>
+            <a:endParaRPr lang="en-US" sz="1400" dirty="0"/>
           </a:p>
         </p:txBody>
       </p:sp>
@@ -7225,81 +7120,79 @@
           <a:ln/>
         </p:spPr>
         <p:txBody>
-          <a:bodyPr wrap="square" lIns="0" tIns="0" rIns="0" bIns="0" rtlCol="0" anchor="t">
-            <a:normAutofit/>
-          </a:bodyPr>
-          <a:lstStyle/>
-          <a:p>
-            <a:pPr marL="228600" indent="-228600">
+          <a:bodyPr wrap="square" lIns="0" tIns="0" rIns="0" bIns="0" rtlCol="0" anchor="t"/>
+          <a:lstStyle/>
+          <a:p>
+            <a:pPr marL="304800" indent="-304800">
               <a:spcAft>
-                <a:spcPts val="600"/>
+                <a:spcPts val="800"/>
               </a:spcAft>
               <a:buSzPct val="100000"/>
               <a:buChar char="•"/>
             </a:pPr>
             <a:r>
-              <a:rPr lang="en-US" sz="1700" dirty="0">
+              <a:rPr lang="en-US" sz="2000" dirty="0">
                 <a:solidFill>
                   <a:srgbClr val="141B26"/>
                 </a:solidFill>
               </a:rPr>
               <a:t>In the past, growth hormone was taken from dead bodies and insulin from cattle: slow and expensive.</a:t>
             </a:r>
-            <a:endParaRPr lang="en-US" sz="1700" dirty="0"/>
-          </a:p>
-          <a:p>
-            <a:pPr marL="228600" indent="-228600">
+            <a:endParaRPr lang="en-US" sz="2000" dirty="0"/>
+          </a:p>
+          <a:p>
+            <a:pPr marL="304800" indent="-304800">
               <a:spcAft>
-                <a:spcPts val="600"/>
+                <a:spcPts val="800"/>
               </a:spcAft>
               <a:buSzPct val="100000"/>
               <a:buChar char="•"/>
             </a:pPr>
             <a:r>
-              <a:rPr lang="en-US" sz="1700" dirty="0">
+              <a:rPr lang="en-US" sz="2000" dirty="0">
                 <a:solidFill>
                   <a:srgbClr val="141B26"/>
                 </a:solidFill>
               </a:rPr>
               <a:t>Now the human gene for the hormone is cut out of a chromosome and put into the DNA of bacteria.</a:t>
             </a:r>
-            <a:endParaRPr lang="en-US" sz="1700" dirty="0"/>
-          </a:p>
-          <a:p>
-            <a:pPr marL="228600" indent="-228600">
+            <a:endParaRPr lang="en-US" sz="2000" dirty="0"/>
+          </a:p>
+          <a:p>
+            <a:pPr marL="304800" indent="-304800">
               <a:spcAft>
-                <a:spcPts val="600"/>
+                <a:spcPts val="800"/>
               </a:spcAft>
               <a:buSzPct val="100000"/>
               <a:buChar char="•"/>
             </a:pPr>
             <a:r>
-              <a:rPr lang="en-US" sz="1700" dirty="0">
+              <a:rPr lang="en-US" sz="2000" dirty="0">
                 <a:solidFill>
                   <a:srgbClr val="141B26"/>
                 </a:solidFill>
               </a:rPr>
               <a:t>The transgenic bacteria make the human hormone.</a:t>
             </a:r>
-            <a:endParaRPr lang="en-US" sz="1700" dirty="0"/>
-          </a:p>
-          <a:p>
-            <a:pPr marL="228600" indent="-228600">
+            <a:endParaRPr lang="en-US" sz="2000" dirty="0"/>
+          </a:p>
+          <a:p>
+            <a:pPr marL="304800" indent="-304800">
               <a:spcAft>
-                <a:spcPts val="600"/>
+                <a:spcPts val="800"/>
               </a:spcAft>
               <a:buSzPct val="100000"/>
               <a:buChar char="•"/>
             </a:pPr>
             <a:r>
-              <a:rPr lang="en-US" sz="1700" dirty="0">
+              <a:rPr lang="en-US" sz="2000" dirty="0">
                 <a:solidFill>
                   <a:srgbClr val="141B26"/>
                 </a:solidFill>
               </a:rPr>
               <a:t>Transgenic means the organism contains DNA from more than one species.</a:t>
             </a:r>
-            <a:endParaRPr lang="en-US" sz="1700" dirty="0"/>
+            <a:endParaRPr lang="en-US" sz="2000" dirty="0"/>
           </a:p>
         </p:txBody>
       </p:sp>
@@ -7336,7 +7229,7 @@
         <p:spPr>
           <a:xfrm>
             <a:off x="6583680" y="4831899"/>
-            <a:ext cx="5029200" cy="502920"/>
+            <a:ext cx="5029200" cy="548640"/>
           </a:xfrm>
           <a:prstGeom prst="rect">
             <a:avLst/>
@@ -7352,7 +7245,7 @@
               <a:buNone/>
             </a:pPr>
             <a:r>
-              <a:rPr lang="en-US" sz="1100" dirty="0">
+              <a:rPr lang="en-US" sz="1300" dirty="0">
                 <a:solidFill>
                   <a:srgbClr val="141B26"/>
                 </a:solidFill>
@@ -7362,21 +7255,21 @@
             <a:pPr algn="l" indent="0" marL="0">
               <a:buNone/>
             </a:pPr>
-            <a:endParaRPr lang="en-US" sz="1100" dirty="0"/>
+            <a:endParaRPr lang="en-US" sz="1300" dirty="0"/>
           </a:p>
           <a:p>
             <a:pPr algn="l" indent="0" marL="0">
               <a:buNone/>
             </a:pPr>
             <a:r>
-              <a:rPr lang="en-US" sz="800" dirty="0">
+              <a:rPr lang="en-US" sz="900" dirty="0">
                 <a:solidFill>
                   <a:srgbClr val="5B6574"/>
                 </a:solidFill>
               </a:rPr>
               <a:t>Image: See-ming Lee (SML), CC BY 2.0, via Wikimedia Commons</a:t>
             </a:r>
-            <a:endParaRPr lang="en-US" sz="1100" dirty="0"/>
+            <a:endParaRPr lang="en-US" sz="1300" dirty="0"/>
           </a:p>
         </p:txBody>
       </p:sp>
@@ -7423,16 +7316,14 @@
           <a:ln/>
         </p:spPr>
         <p:txBody>
-          <a:bodyPr wrap="square" lIns="0" tIns="0" rIns="0" bIns="0" rtlCol="0" anchor="ctr">
-            <a:normAutofit/>
-          </a:bodyPr>
+          <a:bodyPr wrap="square" lIns="0" tIns="0" rIns="0" bIns="0" rtlCol="0" anchor="ctr"/>
           <a:lstStyle/>
           <a:p>
             <a:pPr indent="0" marL="0">
               <a:buNone/>
             </a:pPr>
             <a:r>
-              <a:rPr lang="en-US" sz="1400" b="1" dirty="0">
+              <a:rPr lang="en-US" sz="1700" b="1" dirty="0">
                 <a:solidFill>
                   <a:srgbClr val="7B3A8E"/>
                 </a:solidFill>
@@ -7443,14 +7334,14 @@
               <a:buNone/>
             </a:pPr>
             <a:r>
-              <a:rPr lang="en-US" sz="1400" dirty="0">
+              <a:rPr lang="en-US" sz="1700" dirty="0">
                 <a:solidFill>
                   <a:srgbClr val="141B26"/>
                 </a:solidFill>
               </a:rPr>
               <a:t>A human gene in a bacterium makes the bacterium produce a human protein.</a:t>
             </a:r>
-            <a:endParaRPr lang="en-US" sz="1400" dirty="0"/>
+            <a:endParaRPr lang="en-US" sz="1700" dirty="0"/>
           </a:p>
         </p:txBody>
       </p:sp>
@@ -7650,14 +7541,14 @@
               <a:buNone/>
             </a:pPr>
             <a:r>
-              <a:rPr lang="en-US" sz="1600" dirty="0">
+              <a:rPr lang="en-US" sz="1500" dirty="0">
                 <a:solidFill>
                   <a:srgbClr val="141B26"/>
                 </a:solidFill>
               </a:rPr>
               <a:t>Transgenic bacteria are grown in large fermenters so that they reproduce quickly and make a lot of hormone.</a:t>
             </a:r>
-            <a:endParaRPr lang="en-US" sz="1600" dirty="0"/>
+            <a:endParaRPr lang="en-US" sz="1500" dirty="0"/>
           </a:p>
         </p:txBody>
       </p:sp>
@@ -7728,16 +7619,14 @@
           <a:ln/>
         </p:spPr>
         <p:txBody>
-          <a:bodyPr wrap="square" lIns="0" tIns="0" rIns="0" bIns="0" rtlCol="0" anchor="ctr">
-            <a:normAutofit/>
-          </a:bodyPr>
+          <a:bodyPr wrap="square" lIns="0" tIns="0" rIns="0" bIns="0" rtlCol="0" anchor="ctr"/>
           <a:lstStyle/>
           <a:p>
             <a:pPr indent="0" marL="0">
               <a:buNone/>
             </a:pPr>
             <a:r>
-              <a:rPr lang="en-US" sz="1400" b="1" dirty="0">
+              <a:rPr lang="en-US" sz="1700" b="1" dirty="0">
                 <a:solidFill>
                   <a:srgbClr val="7B3A8E"/>
                 </a:solidFill>
@@ -7748,14 +7637,14 @@
               <a:buNone/>
             </a:pPr>
             <a:r>
-              <a:rPr lang="en-US" sz="1400" dirty="0">
+              <a:rPr lang="en-US" sz="1700" dirty="0">
                 <a:solidFill>
                   <a:srgbClr val="141B26"/>
                 </a:solidFill>
               </a:rPr>
               <a:t>Aseptic: the fermenter and everything put into it are sterilised, so no other microorganisms can grow.</a:t>
             </a:r>
-            <a:endParaRPr lang="en-US" sz="1400" dirty="0"/>
+            <a:endParaRPr lang="en-US" sz="1700" dirty="0"/>
           </a:p>
         </p:txBody>
       </p:sp>
@@ -7955,14 +7844,14 @@
               <a:buNone/>
             </a:pPr>
             <a:r>
-              <a:rPr lang="en-US" sz="1400" i="1" dirty="0">
+              <a:rPr lang="en-US" sz="1600" i="1" dirty="0">
                 <a:solidFill>
                   <a:srgbClr val="5B6574"/>
                 </a:solidFill>
               </a:rPr>
               <a:t>Mini whiteboards. One answer each, then we check.</a:t>
             </a:r>
-            <a:endParaRPr lang="en-US" sz="1400" dirty="0"/>
+            <a:endParaRPr lang="en-US" sz="1600" dirty="0"/>
           </a:p>
         </p:txBody>
       </p:sp>
@@ -8011,16 +7900,14 @@
           <a:ln/>
         </p:spPr>
         <p:txBody>
-          <a:bodyPr wrap="square" lIns="0" tIns="0" rIns="0" bIns="0" rtlCol="0" anchor="ctr">
-            <a:normAutofit/>
-          </a:bodyPr>
+          <a:bodyPr wrap="square" lIns="0" tIns="0" rIns="0" bIns="0" rtlCol="0" anchor="ctr"/>
           <a:lstStyle/>
           <a:p>
             <a:pPr indent="0" marL="0">
               <a:buNone/>
             </a:pPr>
             <a:r>
-              <a:rPr lang="en-US" sz="1600" b="1" dirty="0">
+              <a:rPr lang="en-US" sz="2000" b="1" dirty="0">
                 <a:solidFill>
                   <a:srgbClr val="7B3A8E"/>
                 </a:solidFill>
@@ -8031,14 +7918,14 @@
               <a:buNone/>
             </a:pPr>
             <a:r>
-              <a:rPr lang="en-US" sz="1600" dirty="0">
+              <a:rPr lang="en-US" sz="2000" dirty="0">
                 <a:solidFill>
                   <a:srgbClr val="141B26"/>
                 </a:solidFill>
               </a:rPr>
               <a:t>Why is a medicine a drug?</a:t>
             </a:r>
-            <a:endParaRPr lang="en-US" sz="1600" dirty="0"/>
+            <a:endParaRPr lang="en-US" sz="2000" dirty="0"/>
           </a:p>
         </p:txBody>
       </p:sp>
@@ -8087,16 +7974,14 @@
           <a:ln/>
         </p:spPr>
         <p:txBody>
-          <a:bodyPr wrap="square" lIns="0" tIns="0" rIns="0" bIns="0" rtlCol="0" anchor="ctr">
-            <a:normAutofit/>
-          </a:bodyPr>
+          <a:bodyPr wrap="square" lIns="0" tIns="0" rIns="0" bIns="0" rtlCol="0" anchor="ctr"/>
           <a:lstStyle/>
           <a:p>
             <a:pPr indent="0" marL="0">
               <a:buNone/>
             </a:pPr>
             <a:r>
-              <a:rPr lang="en-US" sz="1600" b="1" dirty="0">
+              <a:rPr lang="en-US" sz="2000" b="1" dirty="0">
                 <a:solidFill>
                   <a:srgbClr val="7B3A8E"/>
                 </a:solidFill>
@@ -8107,14 +7992,14 @@
               <a:buNone/>
             </a:pPr>
             <a:r>
-              <a:rPr lang="en-US" sz="1600" dirty="0">
+              <a:rPr lang="en-US" sz="2000" dirty="0">
                 <a:solidFill>
                   <a:srgbClr val="141B26"/>
                 </a:solidFill>
               </a:rPr>
               <a:t>Would an antibiotic cure flu? Yes or no, and why.</a:t>
             </a:r>
-            <a:endParaRPr lang="en-US" sz="1600" dirty="0"/>
+            <a:endParaRPr lang="en-US" sz="2000" dirty="0"/>
           </a:p>
         </p:txBody>
       </p:sp>
@@ -8163,16 +8048,14 @@
           <a:ln/>
         </p:spPr>
         <p:txBody>
-          <a:bodyPr wrap="square" lIns="0" tIns="0" rIns="0" bIns="0" rtlCol="0" anchor="ctr">
-            <a:normAutofit/>
-          </a:bodyPr>
+          <a:bodyPr wrap="square" lIns="0" tIns="0" rIns="0" bIns="0" rtlCol="0" anchor="ctr"/>
           <a:lstStyle/>
           <a:p>
             <a:pPr indent="0" marL="0">
               <a:buNone/>
             </a:pPr>
             <a:r>
-              <a:rPr lang="en-US" sz="1600" b="1" dirty="0">
+              <a:rPr lang="en-US" sz="2000" b="1" dirty="0">
                 <a:solidFill>
                   <a:srgbClr val="7B3A8E"/>
                 </a:solidFill>
@@ -8183,14 +8066,14 @@
               <a:buNone/>
             </a:pPr>
             <a:r>
-              <a:rPr lang="en-US" sz="1600" dirty="0">
+              <a:rPr lang="en-US" sz="2000" dirty="0">
                 <a:solidFill>
                   <a:srgbClr val="141B26"/>
                 </a:solidFill>
               </a:rPr>
               <a:t>In which organ is insulin made?</a:t>
             </a:r>
-            <a:endParaRPr lang="en-US" sz="1600" dirty="0"/>
+            <a:endParaRPr lang="en-US" sz="2000" dirty="0"/>
           </a:p>
         </p:txBody>
       </p:sp>
@@ -8239,16 +8122,14 @@
           <a:ln/>
         </p:spPr>
         <p:txBody>
-          <a:bodyPr wrap="square" lIns="0" tIns="0" rIns="0" bIns="0" rtlCol="0" anchor="ctr">
-            <a:normAutofit/>
-          </a:bodyPr>
+          <a:bodyPr wrap="square" lIns="0" tIns="0" rIns="0" bIns="0" rtlCol="0" anchor="ctr"/>
           <a:lstStyle/>
           <a:p>
             <a:pPr indent="0" marL="0">
               <a:buNone/>
             </a:pPr>
             <a:r>
-              <a:rPr lang="en-US" sz="1600" b="1" dirty="0">
+              <a:rPr lang="en-US" sz="2000" b="1" dirty="0">
                 <a:solidFill>
                   <a:srgbClr val="7B3A8E"/>
                 </a:solidFill>
@@ -8259,14 +8140,14 @@
               <a:buNone/>
             </a:pPr>
             <a:r>
-              <a:rPr lang="en-US" sz="1600" dirty="0">
+              <a:rPr lang="en-US" sz="2000" dirty="0">
                 <a:solidFill>
                   <a:srgbClr val="141B26"/>
                 </a:solidFill>
               </a:rPr>
               <a:t>What does 'transgenic' mean?</a:t>
             </a:r>
-            <a:endParaRPr lang="en-US" sz="1600" dirty="0"/>
+            <a:endParaRPr lang="en-US" sz="2000" dirty="0"/>
           </a:p>
         </p:txBody>
       </p:sp>
@@ -8315,16 +8196,14 @@
           <a:ln/>
         </p:spPr>
         <p:txBody>
-          <a:bodyPr wrap="square" lIns="0" tIns="0" rIns="0" bIns="0" rtlCol="0" anchor="ctr">
-            <a:normAutofit/>
-          </a:bodyPr>
+          <a:bodyPr wrap="square" lIns="0" tIns="0" rIns="0" bIns="0" rtlCol="0" anchor="ctr"/>
           <a:lstStyle/>
           <a:p>
             <a:pPr indent="0" marL="0">
               <a:buNone/>
             </a:pPr>
             <a:r>
-              <a:rPr lang="en-US" sz="1600" b="1" dirty="0">
+              <a:rPr lang="en-US" sz="2000" b="1" dirty="0">
                 <a:solidFill>
                   <a:srgbClr val="7B3A8E"/>
                 </a:solidFill>
@@ -8335,14 +8214,14 @@
               <a:buNone/>
             </a:pPr>
             <a:r>
-              <a:rPr lang="en-US" sz="1600" dirty="0">
+              <a:rPr lang="en-US" sz="2000" dirty="0">
                 <a:solidFill>
                   <a:srgbClr val="141B26"/>
                 </a:solidFill>
               </a:rPr>
               <a:t>Why is the air bubbled into a fermenter filtered first?</a:t>
             </a:r>
-            <a:endParaRPr lang="en-US" sz="1600" dirty="0"/>
+            <a:endParaRPr lang="en-US" sz="2000" dirty="0"/>
           </a:p>
         </p:txBody>
       </p:sp>
